--- a/ppt_engine/templates/solution_fixed_modules/铁路声屏障行业背景与技术发展（M1_&_M2）.pptx
+++ b/ppt_engine/templates/solution_fixed_modules/铁路声屏障行业背景与技术发展（M1_&_M2）.pptx
@@ -21,6 +21,7 @@
     <p:sldId id="269" r:id="rId15"/>
     <p:sldId id="270" r:id="rId16"/>
     <p:sldId id="271" r:id="rId17"/>
+    <p:sldId id="272" r:id="rId23"/>
   </p:sldIdLst>
   <p:notesMasterIdLst>
     <p:notesMasterId r:id="rId18"/>
@@ -2352,6 +2353,10 @@
           </a:solidFill>
           <a:ln/>
         </p:spPr>
+        <p:txBody>
+          <a:bodyPr/>
+          <a:p/>
+        </p:txBody>
       </p:sp>
       <p:sp>
         <p:nvSpPr>
@@ -2620,6 +2625,10 @@
             <a:prstDash val="solid"/>
           </a:ln>
         </p:spPr>
+        <p:txBody>
+          <a:bodyPr/>
+          <a:p/>
+        </p:txBody>
       </p:sp>
       <p:sp>
         <p:nvSpPr>
@@ -2729,6 +2738,10 @@
             <a:prstDash val="solid"/>
           </a:ln>
         </p:spPr>
+        <p:txBody>
+          <a:bodyPr/>
+          <a:p/>
+        </p:txBody>
       </p:sp>
       <p:sp>
         <p:nvSpPr>
@@ -2836,6 +2849,10 @@
             <a:prstDash val="solid"/>
           </a:ln>
         </p:spPr>
+        <p:txBody>
+          <a:bodyPr/>
+          <a:p/>
+        </p:txBody>
       </p:sp>
       <p:sp>
         <p:nvSpPr>
@@ -2902,6 +2919,10 @@
             <a:prstDash val="solid"/>
           </a:ln>
         </p:spPr>
+        <p:txBody>
+          <a:bodyPr/>
+          <a:p/>
+        </p:txBody>
       </p:sp>
       <p:sp>
         <p:nvSpPr>
@@ -3009,6 +3030,10 @@
             <a:prstDash val="solid"/>
           </a:ln>
         </p:spPr>
+        <p:txBody>
+          <a:bodyPr/>
+          <a:p/>
+        </p:txBody>
       </p:sp>
       <p:sp>
         <p:nvSpPr>
@@ -3075,6 +3100,10 @@
             <a:prstDash val="solid"/>
           </a:ln>
         </p:spPr>
+        <p:txBody>
+          <a:bodyPr/>
+          <a:p/>
+        </p:txBody>
       </p:sp>
       <p:sp>
         <p:nvSpPr>
@@ -3182,6 +3211,10 @@
             <a:prstDash val="solid"/>
           </a:ln>
         </p:spPr>
+        <p:txBody>
+          <a:bodyPr/>
+          <a:p/>
+        </p:txBody>
       </p:sp>
       <p:sp>
         <p:nvSpPr>
@@ -3243,6 +3276,10 @@
           </a:solidFill>
           <a:ln/>
         </p:spPr>
+        <p:txBody>
+          <a:bodyPr/>
+          <a:p/>
+        </p:txBody>
       </p:sp>
       <p:sp>
         <p:nvSpPr>
@@ -3263,6 +3300,10 @@
           </a:solidFill>
           <a:ln/>
         </p:spPr>
+        <p:txBody>
+          <a:bodyPr/>
+          <a:p/>
+        </p:txBody>
       </p:sp>
       <p:sp>
         <p:nvSpPr>
@@ -3283,6 +3324,10 @@
           </a:solidFill>
           <a:ln/>
         </p:spPr>
+        <p:txBody>
+          <a:bodyPr/>
+          <a:p/>
+        </p:txBody>
       </p:sp>
       <p:sp>
         <p:nvSpPr>
@@ -3303,6 +3348,10 @@
           </a:solidFill>
           <a:ln/>
         </p:spPr>
+        <p:txBody>
+          <a:bodyPr/>
+          <a:p/>
+        </p:txBody>
       </p:sp>
       <p:sp>
         <p:nvSpPr>
@@ -3323,6 +3372,10 @@
           </a:solidFill>
           <a:ln/>
         </p:spPr>
+        <p:txBody>
+          <a:bodyPr/>
+          <a:p/>
+        </p:txBody>
       </p:sp>
       <p:sp>
         <p:nvSpPr>
@@ -3343,6 +3396,10 @@
           </a:solidFill>
           <a:ln/>
         </p:spPr>
+        <p:txBody>
+          <a:bodyPr/>
+          <a:p/>
+        </p:txBody>
       </p:sp>
       <p:sp>
         <p:nvSpPr>
@@ -3459,6 +3516,10 @@
           </a:solidFill>
           <a:ln/>
         </p:spPr>
+        <p:txBody>
+          <a:bodyPr/>
+          <a:p/>
+        </p:txBody>
       </p:sp>
       <p:sp>
         <p:nvSpPr>
@@ -3730,6 +3791,10 @@
           </a:solidFill>
           <a:ln/>
         </p:spPr>
+        <p:txBody>
+          <a:bodyPr/>
+          <a:p/>
+        </p:txBody>
       </p:sp>
       <p:sp>
         <p:nvSpPr>
@@ -3750,6 +3815,10 @@
           </a:solidFill>
           <a:ln/>
         </p:spPr>
+        <p:txBody>
+          <a:bodyPr/>
+          <a:p/>
+        </p:txBody>
       </p:sp>
       <p:sp>
         <p:nvSpPr>
@@ -3770,6 +3839,10 @@
           </a:solidFill>
           <a:ln/>
         </p:spPr>
+        <p:txBody>
+          <a:bodyPr/>
+          <a:p/>
+        </p:txBody>
       </p:sp>
       <p:sp>
         <p:nvSpPr>
@@ -3790,6 +3863,10 @@
           </a:solidFill>
           <a:ln/>
         </p:spPr>
+        <p:txBody>
+          <a:bodyPr/>
+          <a:p/>
+        </p:txBody>
       </p:sp>
       <p:sp>
         <p:nvSpPr>
@@ -3810,6 +3887,10 @@
           </a:solidFill>
           <a:ln/>
         </p:spPr>
+        <p:txBody>
+          <a:bodyPr/>
+          <a:p/>
+        </p:txBody>
       </p:sp>
       <p:sp>
         <p:nvSpPr>
@@ -3830,6 +3911,10 @@
           </a:solidFill>
           <a:ln/>
         </p:spPr>
+        <p:txBody>
+          <a:bodyPr/>
+          <a:p/>
+        </p:txBody>
       </p:sp>
       <p:sp>
         <p:nvSpPr>
@@ -3850,6 +3935,10 @@
           </a:solidFill>
           <a:ln/>
         </p:spPr>
+        <p:txBody>
+          <a:bodyPr/>
+          <a:p/>
+        </p:txBody>
       </p:sp>
       <p:sp>
         <p:nvSpPr>
@@ -3957,6 +4046,10 @@
             <a:prstDash val="dash"/>
           </a:ln>
         </p:spPr>
+        <p:txBody>
+          <a:bodyPr/>
+          <a:p/>
+        </p:txBody>
       </p:sp>
       <p:sp>
         <p:nvSpPr>
@@ -4018,6 +4111,10 @@
           </a:solidFill>
           <a:ln/>
         </p:spPr>
+        <p:txBody>
+          <a:bodyPr/>
+          <a:p/>
+        </p:txBody>
       </p:sp>
       <p:sp>
         <p:nvSpPr>
@@ -4038,6 +4135,10 @@
           </a:solidFill>
           <a:ln/>
         </p:spPr>
+        <p:txBody>
+          <a:bodyPr/>
+          <a:p/>
+        </p:txBody>
       </p:sp>
       <p:sp>
         <p:nvSpPr>
@@ -4058,6 +4159,10 @@
           </a:solidFill>
           <a:ln/>
         </p:spPr>
+        <p:txBody>
+          <a:bodyPr/>
+          <a:p/>
+        </p:txBody>
       </p:sp>
       <p:sp>
         <p:nvSpPr>
@@ -4078,6 +4183,10 @@
           </a:solidFill>
           <a:ln/>
         </p:spPr>
+        <p:txBody>
+          <a:bodyPr/>
+          <a:p/>
+        </p:txBody>
       </p:sp>
       <p:sp>
         <p:nvSpPr>
@@ -4098,6 +4207,10 @@
           </a:solidFill>
           <a:ln/>
         </p:spPr>
+        <p:txBody>
+          <a:bodyPr/>
+          <a:p/>
+        </p:txBody>
       </p:sp>
       <p:sp>
         <p:nvSpPr>
@@ -4118,6 +4231,10 @@
           </a:solidFill>
           <a:ln/>
         </p:spPr>
+        <p:txBody>
+          <a:bodyPr/>
+          <a:p/>
+        </p:txBody>
       </p:sp>
       <p:sp>
         <p:nvSpPr>
@@ -4138,6 +4255,10 @@
           </a:solidFill>
           <a:ln/>
         </p:spPr>
+        <p:txBody>
+          <a:bodyPr/>
+          <a:p/>
+        </p:txBody>
       </p:sp>
       <p:sp>
         <p:nvSpPr>
@@ -4245,6 +4366,10 @@
             <a:prstDash val="dash"/>
           </a:ln>
         </p:spPr>
+        <p:txBody>
+          <a:bodyPr/>
+          <a:p/>
+        </p:txBody>
       </p:sp>
       <p:sp>
         <p:nvSpPr>
@@ -4306,6 +4431,10 @@
           </a:solidFill>
           <a:ln/>
         </p:spPr>
+        <p:txBody>
+          <a:bodyPr/>
+          <a:p/>
+        </p:txBody>
       </p:sp>
       <p:sp>
         <p:nvSpPr>
@@ -4612,6 +4741,10 @@
           </a:solidFill>
           <a:ln/>
         </p:spPr>
+        <p:txBody>
+          <a:bodyPr/>
+          <a:p/>
+        </p:txBody>
       </p:sp>
       <p:sp>
         <p:nvSpPr>
@@ -4632,6 +4765,10 @@
           </a:solidFill>
           <a:ln/>
         </p:spPr>
+        <p:txBody>
+          <a:bodyPr/>
+          <a:p/>
+        </p:txBody>
       </p:sp>
       <p:sp>
         <p:nvSpPr>
@@ -4652,6 +4789,10 @@
           </a:solidFill>
           <a:ln/>
         </p:spPr>
+        <p:txBody>
+          <a:bodyPr/>
+          <a:p/>
+        </p:txBody>
       </p:sp>
       <p:sp>
         <p:nvSpPr>
@@ -4672,6 +4813,10 @@
           </a:solidFill>
           <a:ln/>
         </p:spPr>
+        <p:txBody>
+          <a:bodyPr/>
+          <a:p/>
+        </p:txBody>
       </p:sp>
       <p:sp>
         <p:nvSpPr>
@@ -4692,6 +4837,10 @@
           </a:solidFill>
           <a:ln/>
         </p:spPr>
+        <p:txBody>
+          <a:bodyPr/>
+          <a:p/>
+        </p:txBody>
       </p:sp>
       <p:sp>
         <p:nvSpPr>
@@ -4856,6 +5005,10 @@
           </a:solidFill>
           <a:ln/>
         </p:spPr>
+        <p:txBody>
+          <a:bodyPr/>
+          <a:p/>
+        </p:txBody>
       </p:sp>
       <p:sp>
         <p:nvSpPr>
@@ -4876,6 +5029,10 @@
           </a:solidFill>
           <a:ln/>
         </p:spPr>
+        <p:txBody>
+          <a:bodyPr/>
+          <a:p/>
+        </p:txBody>
       </p:sp>
       <p:sp>
         <p:nvSpPr>
@@ -4896,6 +5053,10 @@
           </a:solidFill>
           <a:ln/>
         </p:spPr>
+        <p:txBody>
+          <a:bodyPr/>
+          <a:p/>
+        </p:txBody>
       </p:sp>
       <p:sp>
         <p:nvSpPr>
@@ -4916,6 +5077,10 @@
           </a:solidFill>
           <a:ln/>
         </p:spPr>
+        <p:txBody>
+          <a:bodyPr/>
+          <a:p/>
+        </p:txBody>
       </p:sp>
       <p:sp>
         <p:nvSpPr>
@@ -4936,6 +5101,10 @@
           </a:solidFill>
           <a:ln/>
         </p:spPr>
+        <p:txBody>
+          <a:bodyPr/>
+          <a:p/>
+        </p:txBody>
       </p:sp>
       <p:sp>
         <p:nvSpPr>
@@ -4961,6 +5130,10 @@
             <a:prstDash val="dash"/>
           </a:ln>
         </p:spPr>
+        <p:txBody>
+          <a:bodyPr/>
+          <a:p/>
+        </p:txBody>
       </p:sp>
       <p:sp>
         <p:nvSpPr>
@@ -5086,6 +5259,10 @@
           </a:solidFill>
           <a:ln/>
         </p:spPr>
+        <p:txBody>
+          <a:bodyPr/>
+          <a:p/>
+        </p:txBody>
       </p:sp>
       <p:sp>
         <p:nvSpPr>
@@ -5106,6 +5283,10 @@
           </a:solidFill>
           <a:ln/>
         </p:spPr>
+        <p:txBody>
+          <a:bodyPr/>
+          <a:p/>
+        </p:txBody>
       </p:sp>
       <p:sp>
         <p:nvSpPr>
@@ -5126,6 +5307,10 @@
           </a:solidFill>
           <a:ln/>
         </p:spPr>
+        <p:txBody>
+          <a:bodyPr/>
+          <a:p/>
+        </p:txBody>
       </p:sp>
       <p:sp>
         <p:nvSpPr>
@@ -5146,6 +5331,10 @@
           </a:solidFill>
           <a:ln/>
         </p:spPr>
+        <p:txBody>
+          <a:bodyPr/>
+          <a:p/>
+        </p:txBody>
       </p:sp>
       <p:sp>
         <p:nvSpPr>
@@ -5166,6 +5355,10 @@
           </a:solidFill>
           <a:ln/>
         </p:spPr>
+        <p:txBody>
+          <a:bodyPr/>
+          <a:p/>
+        </p:txBody>
       </p:sp>
       <p:sp>
         <p:nvSpPr>
@@ -5191,6 +5384,10 @@
             <a:prstDash val="dash"/>
           </a:ln>
         </p:spPr>
+        <p:txBody>
+          <a:bodyPr/>
+          <a:p/>
+        </p:txBody>
       </p:sp>
       <p:sp>
         <p:nvSpPr>
@@ -5448,6 +5645,10 @@
           </a:solidFill>
           <a:ln/>
         </p:spPr>
+        <p:txBody>
+          <a:bodyPr/>
+          <a:p/>
+        </p:txBody>
       </p:sp>
       <p:sp>
         <p:nvSpPr>
@@ -5468,6 +5669,10 @@
           </a:solidFill>
           <a:ln/>
         </p:spPr>
+        <p:txBody>
+          <a:bodyPr/>
+          <a:p/>
+        </p:txBody>
       </p:sp>
       <p:sp>
         <p:nvSpPr>
@@ -5665,6 +5870,10 @@
           </a:solidFill>
           <a:ln/>
         </p:spPr>
+        <p:txBody>
+          <a:bodyPr/>
+          <a:p/>
+        </p:txBody>
       </p:sp>
       <p:sp>
         <p:nvSpPr>
@@ -5685,6 +5894,10 @@
           </a:solidFill>
           <a:ln/>
         </p:spPr>
+        <p:txBody>
+          <a:bodyPr/>
+          <a:p/>
+        </p:txBody>
       </p:sp>
       <p:sp>
         <p:nvSpPr>
@@ -5705,6 +5918,10 @@
           </a:solidFill>
           <a:ln/>
         </p:spPr>
+        <p:txBody>
+          <a:bodyPr/>
+          <a:p/>
+        </p:txBody>
       </p:sp>
       <p:sp>
         <p:nvSpPr>
@@ -5725,6 +5942,10 @@
           </a:solidFill>
           <a:ln/>
         </p:spPr>
+        <p:txBody>
+          <a:bodyPr/>
+          <a:p/>
+        </p:txBody>
       </p:sp>
       <p:sp>
         <p:nvSpPr>
@@ -5745,6 +5966,10 @@
           </a:solidFill>
           <a:ln/>
         </p:spPr>
+        <p:txBody>
+          <a:bodyPr/>
+          <a:p/>
+        </p:txBody>
       </p:sp>
       <p:sp>
         <p:nvSpPr>
@@ -5765,6 +5990,10 @@
           </a:solidFill>
           <a:ln/>
         </p:spPr>
+        <p:txBody>
+          <a:bodyPr/>
+          <a:p/>
+        </p:txBody>
       </p:sp>
       <p:sp>
         <p:nvSpPr>
@@ -5785,6 +6014,10 @@
           </a:solidFill>
           <a:ln/>
         </p:spPr>
+        <p:txBody>
+          <a:bodyPr/>
+          <a:p/>
+        </p:txBody>
       </p:sp>
       <p:sp>
         <p:nvSpPr>
@@ -5887,6 +6120,10 @@
           </a:solidFill>
           <a:ln/>
         </p:spPr>
+        <p:txBody>
+          <a:bodyPr/>
+          <a:p/>
+        </p:txBody>
       </p:sp>
       <p:sp>
         <p:nvSpPr>
@@ -5907,6 +6144,10 @@
           </a:solidFill>
           <a:ln/>
         </p:spPr>
+        <p:txBody>
+          <a:bodyPr/>
+          <a:p/>
+        </p:txBody>
       </p:sp>
       <p:sp>
         <p:nvSpPr>
@@ -5927,6 +6168,10 @@
           </a:solidFill>
           <a:ln/>
         </p:spPr>
+        <p:txBody>
+          <a:bodyPr/>
+          <a:p/>
+        </p:txBody>
       </p:sp>
       <p:sp>
         <p:nvSpPr>
@@ -5947,6 +6192,10 @@
           </a:solidFill>
           <a:ln/>
         </p:spPr>
+        <p:txBody>
+          <a:bodyPr/>
+          <a:p/>
+        </p:txBody>
       </p:sp>
       <p:sp>
         <p:nvSpPr>
@@ -5967,6 +6216,10 @@
           </a:solidFill>
           <a:ln/>
         </p:spPr>
+        <p:txBody>
+          <a:bodyPr/>
+          <a:p/>
+        </p:txBody>
       </p:sp>
       <p:sp>
         <p:nvSpPr>
@@ -5987,6 +6240,10 @@
           </a:solidFill>
           <a:ln/>
         </p:spPr>
+        <p:txBody>
+          <a:bodyPr/>
+          <a:p/>
+        </p:txBody>
       </p:sp>
       <p:sp>
         <p:nvSpPr>
@@ -6007,6 +6264,10 @@
           </a:solidFill>
           <a:ln/>
         </p:spPr>
+        <p:txBody>
+          <a:bodyPr/>
+          <a:p/>
+        </p:txBody>
       </p:sp>
       <p:sp>
         <p:nvSpPr>
@@ -6305,6 +6566,10 @@
           </a:solidFill>
           <a:ln/>
         </p:spPr>
+        <p:txBody>
+          <a:bodyPr/>
+          <a:p/>
+        </p:txBody>
       </p:sp>
       <p:sp>
         <p:nvSpPr>
@@ -6325,6 +6590,10 @@
           </a:solidFill>
           <a:ln/>
         </p:spPr>
+        <p:txBody>
+          <a:bodyPr/>
+          <a:p/>
+        </p:txBody>
       </p:sp>
       <p:sp>
         <p:nvSpPr>
@@ -6345,6 +6614,10 @@
           </a:solidFill>
           <a:ln/>
         </p:spPr>
+        <p:txBody>
+          <a:bodyPr/>
+          <a:p/>
+        </p:txBody>
       </p:sp>
       <p:sp>
         <p:nvSpPr>
@@ -6365,6 +6638,10 @@
           </a:solidFill>
           <a:ln/>
         </p:spPr>
+        <p:txBody>
+          <a:bodyPr/>
+          <a:p/>
+        </p:txBody>
       </p:sp>
       <p:sp>
         <p:nvSpPr>
@@ -6385,6 +6662,10 @@
           </a:solidFill>
           <a:ln/>
         </p:spPr>
+        <p:txBody>
+          <a:bodyPr/>
+          <a:p/>
+        </p:txBody>
       </p:sp>
       <p:sp>
         <p:nvSpPr>
@@ -6405,6 +6686,10 @@
           </a:solidFill>
           <a:ln/>
         </p:spPr>
+        <p:txBody>
+          <a:bodyPr/>
+          <a:p/>
+        </p:txBody>
       </p:sp>
       <p:sp>
         <p:nvSpPr>
@@ -6425,6 +6710,10 @@
           </a:solidFill>
           <a:ln/>
         </p:spPr>
+        <p:txBody>
+          <a:bodyPr/>
+          <a:p/>
+        </p:txBody>
       </p:sp>
       <p:sp>
         <p:nvSpPr>
@@ -6552,6 +6841,10 @@
           </a:solidFill>
           <a:ln/>
         </p:spPr>
+        <p:txBody>
+          <a:bodyPr/>
+          <a:p/>
+        </p:txBody>
       </p:sp>
       <p:sp>
         <p:nvSpPr>
@@ -6572,6 +6865,10 @@
           </a:solidFill>
           <a:ln/>
         </p:spPr>
+        <p:txBody>
+          <a:bodyPr/>
+          <a:p/>
+        </p:txBody>
       </p:sp>
       <p:sp>
         <p:nvSpPr>
@@ -6592,6 +6889,10 @@
           </a:solidFill>
           <a:ln/>
         </p:spPr>
+        <p:txBody>
+          <a:bodyPr/>
+          <a:p/>
+        </p:txBody>
       </p:sp>
       <p:sp>
         <p:nvSpPr>
@@ -6612,6 +6913,10 @@
           </a:solidFill>
           <a:ln/>
         </p:spPr>
+        <p:txBody>
+          <a:bodyPr/>
+          <a:p/>
+        </p:txBody>
       </p:sp>
       <p:sp>
         <p:nvSpPr>
@@ -6632,6 +6937,10 @@
           </a:solidFill>
           <a:ln/>
         </p:spPr>
+        <p:txBody>
+          <a:bodyPr/>
+          <a:p/>
+        </p:txBody>
       </p:sp>
       <p:sp>
         <p:nvSpPr>
@@ -6652,6 +6961,10 @@
           </a:solidFill>
           <a:ln/>
         </p:spPr>
+        <p:txBody>
+          <a:bodyPr/>
+          <a:p/>
+        </p:txBody>
       </p:sp>
       <p:sp>
         <p:nvSpPr>
@@ -6672,6 +6985,10 @@
           </a:solidFill>
           <a:ln/>
         </p:spPr>
+        <p:txBody>
+          <a:bodyPr/>
+          <a:p/>
+        </p:txBody>
       </p:sp>
       <p:sp>
         <p:nvSpPr>
@@ -6810,6 +7127,10 @@
           </a:solidFill>
           <a:ln/>
         </p:spPr>
+        <p:txBody>
+          <a:bodyPr/>
+          <a:p/>
+        </p:txBody>
       </p:sp>
       <p:sp>
         <p:nvSpPr>
@@ -6830,6 +7151,10 @@
           </a:solidFill>
           <a:ln/>
         </p:spPr>
+        <p:txBody>
+          <a:bodyPr/>
+          <a:p/>
+        </p:txBody>
       </p:sp>
       <p:sp>
         <p:nvSpPr>
@@ -6850,6 +7175,10 @@
           </a:solidFill>
           <a:ln/>
         </p:spPr>
+        <p:txBody>
+          <a:bodyPr/>
+          <a:p/>
+        </p:txBody>
       </p:sp>
       <p:sp>
         <p:nvSpPr>
@@ -6870,6 +7199,10 @@
           </a:solidFill>
           <a:ln/>
         </p:spPr>
+        <p:txBody>
+          <a:bodyPr/>
+          <a:p/>
+        </p:txBody>
       </p:sp>
       <p:sp>
         <p:nvSpPr>
@@ -6890,6 +7223,10 @@
           </a:solidFill>
           <a:ln/>
         </p:spPr>
+        <p:txBody>
+          <a:bodyPr/>
+          <a:p/>
+        </p:txBody>
       </p:sp>
       <p:sp>
         <p:nvSpPr>
@@ -6910,6 +7247,10 @@
           </a:solidFill>
           <a:ln/>
         </p:spPr>
+        <p:txBody>
+          <a:bodyPr/>
+          <a:p/>
+        </p:txBody>
       </p:sp>
       <p:sp>
         <p:nvSpPr>
@@ -6930,6 +7271,10 @@
           </a:solidFill>
           <a:ln/>
         </p:spPr>
+        <p:txBody>
+          <a:bodyPr/>
+          <a:p/>
+        </p:txBody>
       </p:sp>
       <p:sp>
         <p:nvSpPr>
@@ -7217,6 +7562,10 @@
             <a:prstDash val="solid"/>
           </a:ln>
         </p:spPr>
+        <p:txBody>
+          <a:bodyPr/>
+          <a:p/>
+        </p:txBody>
       </p:sp>
       <p:sp>
         <p:nvSpPr>
@@ -7283,6 +7632,10 @@
             <a:prstDash val="solid"/>
           </a:ln>
         </p:spPr>
+        <p:txBody>
+          <a:bodyPr/>
+          <a:p/>
+        </p:txBody>
       </p:sp>
       <p:sp>
         <p:nvSpPr>
@@ -7349,6 +7702,10 @@
             <a:prstDash val="solid"/>
           </a:ln>
         </p:spPr>
+        <p:txBody>
+          <a:bodyPr/>
+          <a:p/>
+        </p:txBody>
       </p:sp>
       <p:sp>
         <p:nvSpPr>
@@ -7415,6 +7772,10 @@
             <a:prstDash val="solid"/>
           </a:ln>
         </p:spPr>
+        <p:txBody>
+          <a:bodyPr/>
+          <a:p/>
+        </p:txBody>
       </p:sp>
       <p:sp>
         <p:nvSpPr>
@@ -7640,6 +8001,10 @@
           </a:solidFill>
           <a:ln/>
         </p:spPr>
+        <p:txBody>
+          <a:bodyPr/>
+          <a:p/>
+        </p:txBody>
       </p:sp>
       <p:sp>
         <p:nvSpPr>
@@ -7988,6 +8353,10 @@
           </a:solidFill>
           <a:ln/>
         </p:spPr>
+        <p:txBody>
+          <a:bodyPr/>
+          <a:p/>
+        </p:txBody>
       </p:sp>
       <p:sp>
         <p:nvSpPr>
@@ -8336,6 +8705,10 @@
           </a:solidFill>
           <a:ln/>
         </p:spPr>
+        <p:txBody>
+          <a:bodyPr/>
+          <a:p/>
+        </p:txBody>
       </p:sp>
       <p:sp>
         <p:nvSpPr>
@@ -8552,6 +8925,10 @@
           </a:solidFill>
           <a:ln/>
         </p:spPr>
+        <p:txBody>
+          <a:bodyPr/>
+          <a:p/>
+        </p:txBody>
       </p:sp>
       <p:sp>
         <p:nvSpPr>
@@ -8638,6 +9015,458 @@
               <a:t>2026年</a:t>
             </a:r>
             <a:endParaRPr lang="en-US" sz="850" dirty="0"/>
+          </a:p>
+        </p:txBody>
+      </p:sp>
+    </p:spTree>
+  </p:cSld>
+  <p:clrMapOvr>
+    <a:masterClrMapping/>
+  </p:clrMapOvr>
+</p:sld>
+</file>
+
+<file path=ppt/slides/slide17.xml><?xml version="1.0" encoding="utf-8"?>
+<p:sld xmlns:a="http://schemas.openxmlformats.org/drawingml/2006/main" xmlns:p="http://schemas.openxmlformats.org/presentationml/2006/main" xmlns:r="http://schemas.openxmlformats.org/officeDocument/2006/relationships">
+  <p:cSld>
+    <p:bg>
+      <p:bgPr>
+        <a:solidFill>
+          <a:srgbClr val="F7FAFC"/>
+        </a:solidFill>
+        <a:effectLst/>
+      </p:bgPr>
+    </p:bg>
+    <p:spTree>
+      <p:nvGrpSpPr>
+        <p:cNvPr id="1" name=""/>
+        <p:cNvGrpSpPr/>
+        <p:nvPr/>
+      </p:nvGrpSpPr>
+      <p:grpSpPr/>
+      <p:sp>
+        <p:nvSpPr>
+          <p:cNvPr id="2" name="Rectangle 1"/>
+          <p:cNvSpPr/>
+          <p:nvPr/>
+        </p:nvSpPr>
+        <p:spPr>
+          <a:xfrm>
+            <a:off x="0" y="0"/>
+            <a:ext cx="12191695" cy="164592"/>
+          </a:xfrm>
+          <a:prstGeom prst="rect">
+            <a:avLst/>
+          </a:prstGeom>
+          <a:solidFill>
+            <a:srgbClr val="1565C0"/>
+          </a:solidFill>
+          <a:ln>
+            <a:noFill/>
+          </a:ln>
+        </p:spPr>
+        <p:style>
+          <a:lnRef idx="1">
+            <a:schemeClr val="accent1"/>
+          </a:lnRef>
+          <a:fillRef idx="3">
+            <a:schemeClr val="accent1"/>
+          </a:fillRef>
+          <a:effectRef idx="2">
+            <a:schemeClr val="accent1"/>
+          </a:effectRef>
+          <a:fontRef idx="minor">
+            <a:schemeClr val="lt1"/>
+          </a:fontRef>
+        </p:style>
+        <p:txBody>
+          <a:bodyPr rtlCol="0" anchor="ctr"/>
+          <a:lstStyle/>
+          <a:p>
+            <a:pPr algn="ctr"/>
+          </a:p>
+        </p:txBody>
+      </p:sp>
+      <p:sp>
+        <p:nvSpPr>
+          <p:cNvPr id="3" name="TextBox 2"/>
+          <p:cNvSpPr txBox="1"/>
+          <p:nvPr/>
+        </p:nvSpPr>
+        <p:spPr>
+          <a:xfrm>
+            <a:off x="502920" y="320040"/>
+            <a:ext cx="6583680" cy="274320"/>
+          </a:xfrm>
+          <a:prstGeom prst="rect">
+            <a:avLst/>
+          </a:prstGeom>
+          <a:noFill/>
+        </p:spPr>
+        <p:txBody>
+          <a:bodyPr wrap="none">
+            <a:spAutoFit/>
+          </a:bodyPr>
+          <a:lstStyle/>
+          <a:p>
+            <a:r>
+              <a:rPr sz="1200" b="1">
+                <a:solidFill>
+                  <a:srgbClr val="1A3A6B"/>
+                </a:solidFill>
+                <a:latin typeface="Microsoft YaHei"/>
+              </a:rPr>
+              <a:t>中驰智能PPT Demo</a:t>
+            </a:r>
+          </a:p>
+        </p:txBody>
+      </p:sp>
+      <p:sp>
+        <p:nvSpPr>
+          <p:cNvPr id="4" name="TextBox 3"/>
+          <p:cNvSpPr txBox="1"/>
+          <p:nvPr/>
+        </p:nvSpPr>
+        <p:spPr>
+          <a:xfrm>
+            <a:off x="9509760" y="320040"/>
+            <a:ext cx="2103120" cy="274320"/>
+          </a:xfrm>
+          <a:prstGeom prst="rect">
+            <a:avLst/>
+          </a:prstGeom>
+          <a:noFill/>
+        </p:spPr>
+        <p:txBody>
+          <a:bodyPr wrap="none">
+            <a:spAutoFit/>
+          </a:bodyPr>
+          <a:lstStyle/>
+          <a:p>
+            <a:r>
+              <a:rPr sz="1100" b="1">
+                <a:solidFill>
+                  <a:srgbClr val="CA8A04"/>
+                </a:solidFill>
+                <a:latin typeface="Microsoft YaHei"/>
+              </a:rPr>
+              <a:t>M1/M2 | 项目生成信息</a:t>
+            </a:r>
+          </a:p>
+        </p:txBody>
+      </p:sp>
+      <p:sp>
+        <p:nvSpPr>
+          <p:cNvPr id="5" name="TextBox 4"/>
+          <p:cNvSpPr txBox="1"/>
+          <p:nvPr/>
+        </p:nvSpPr>
+        <p:spPr>
+          <a:xfrm>
+            <a:off x="640080" y="640080"/>
+            <a:ext cx="9144000" cy="502920"/>
+          </a:xfrm>
+          <a:prstGeom prst="rect">
+            <a:avLst/>
+          </a:prstGeom>
+          <a:noFill/>
+        </p:spPr>
+        <p:txBody>
+          <a:bodyPr wrap="none">
+            <a:spAutoFit/>
+          </a:bodyPr>
+          <a:lstStyle/>
+          <a:p>
+            <a:r>
+              <a:rPr sz="2600" b="1">
+                <a:solidFill>
+                  <a:srgbClr val="1A3A6B"/>
+                </a:solidFill>
+                <a:latin typeface="Microsoft YaHei"/>
+              </a:rPr>
+              <a:t>项目生成信息</a:t>
+            </a:r>
+          </a:p>
+        </p:txBody>
+      </p:sp>
+      <p:sp>
+        <p:nvSpPr>
+          <p:cNvPr id="6" name="Rectangle 5"/>
+          <p:cNvSpPr/>
+          <p:nvPr/>
+        </p:nvSpPr>
+        <p:spPr>
+          <a:xfrm>
+            <a:off x="640080" y="1234440"/>
+            <a:ext cx="1828800" cy="54864"/>
+          </a:xfrm>
+          <a:prstGeom prst="rect">
+            <a:avLst/>
+          </a:prstGeom>
+          <a:solidFill>
+            <a:srgbClr val="1565C0"/>
+          </a:solidFill>
+          <a:ln>
+            <a:noFill/>
+          </a:ln>
+        </p:spPr>
+        <p:style>
+          <a:lnRef idx="1">
+            <a:schemeClr val="accent1"/>
+          </a:lnRef>
+          <a:fillRef idx="3">
+            <a:schemeClr val="accent1"/>
+          </a:fillRef>
+          <a:effectRef idx="2">
+            <a:schemeClr val="accent1"/>
+          </a:effectRef>
+          <a:fontRef idx="minor">
+            <a:schemeClr val="lt1"/>
+          </a:fontRef>
+        </p:style>
+        <p:txBody>
+          <a:bodyPr rtlCol="0" anchor="ctr"/>
+          <a:lstStyle/>
+          <a:p>
+            <a:pPr algn="ctr"/>
+          </a:p>
+        </p:txBody>
+      </p:sp>
+      <p:sp>
+        <p:nvSpPr>
+          <p:cNvPr id="7" name="TextBox 6"/>
+          <p:cNvSpPr txBox="1"/>
+          <p:nvPr/>
+        </p:nvSpPr>
+        <p:spPr>
+          <a:xfrm>
+            <a:off x="822960" y="1508760"/>
+            <a:ext cx="9601200" cy="411480"/>
+          </a:xfrm>
+          <a:prstGeom prst="rect">
+            <a:avLst/>
+          </a:prstGeom>
+          <a:noFill/>
+        </p:spPr>
+        <p:txBody>
+          <a:bodyPr wrap="none">
+            <a:spAutoFit/>
+          </a:bodyPr>
+          <a:lstStyle/>
+          <a:p>
+            <a:r>
+              <a:rPr sz="1600" b="0">
+                <a:solidFill>
+                  <a:srgbClr val="1F2937"/>
+                </a:solidFill>
+                <a:latin typeface="Microsoft YaHei"/>
+              </a:rPr>
+              <a:t>项目名称：{{project_name}}</a:t>
+            </a:r>
+          </a:p>
+        </p:txBody>
+      </p:sp>
+      <p:sp>
+        <p:nvSpPr>
+          <p:cNvPr id="8" name="TextBox 7"/>
+          <p:cNvSpPr txBox="1"/>
+          <p:nvPr/>
+        </p:nvSpPr>
+        <p:spPr>
+          <a:xfrm>
+            <a:off x="822960" y="2011680"/>
+            <a:ext cx="9601200" cy="411480"/>
+          </a:xfrm>
+          <a:prstGeom prst="rect">
+            <a:avLst/>
+          </a:prstGeom>
+          <a:noFill/>
+        </p:spPr>
+        <p:txBody>
+          <a:bodyPr wrap="none">
+            <a:spAutoFit/>
+          </a:bodyPr>
+          <a:lstStyle/>
+          <a:p>
+            <a:r>
+              <a:rPr sz="1600" b="0">
+                <a:solidFill>
+                  <a:srgbClr val="1F2937"/>
+                </a:solidFill>
+                <a:latin typeface="Microsoft YaHei"/>
+              </a:rPr>
+              <a:t>项目所在地：{{project_location}}</a:t>
+            </a:r>
+          </a:p>
+        </p:txBody>
+      </p:sp>
+      <p:sp>
+        <p:nvSpPr>
+          <p:cNvPr id="9" name="TextBox 8"/>
+          <p:cNvSpPr txBox="1"/>
+          <p:nvPr/>
+        </p:nvSpPr>
+        <p:spPr>
+          <a:xfrm>
+            <a:off x="822960" y="2514600"/>
+            <a:ext cx="9601200" cy="411480"/>
+          </a:xfrm>
+          <a:prstGeom prst="rect">
+            <a:avLst/>
+          </a:prstGeom>
+          <a:noFill/>
+        </p:spPr>
+        <p:txBody>
+          <a:bodyPr wrap="none">
+            <a:spAutoFit/>
+          </a:bodyPr>
+          <a:lstStyle/>
+          <a:p>
+            <a:r>
+              <a:rPr sz="1600" b="0">
+                <a:solidFill>
+                  <a:srgbClr val="1F2937"/>
+                </a:solidFill>
+                <a:latin typeface="Microsoft YaHei"/>
+              </a:rPr>
+              <a:t>建设/业主单位：{{owner_unit}}</a:t>
+            </a:r>
+          </a:p>
+        </p:txBody>
+      </p:sp>
+      <p:sp>
+        <p:nvSpPr>
+          <p:cNvPr id="10" name="TextBox 9"/>
+          <p:cNvSpPr txBox="1"/>
+          <p:nvPr/>
+        </p:nvSpPr>
+        <p:spPr>
+          <a:xfrm>
+            <a:off x="822960" y="3017520"/>
+            <a:ext cx="9601200" cy="411480"/>
+          </a:xfrm>
+          <a:prstGeom prst="rect">
+            <a:avLst/>
+          </a:prstGeom>
+          <a:noFill/>
+        </p:spPr>
+        <p:txBody>
+          <a:bodyPr wrap="none">
+            <a:spAutoFit/>
+          </a:bodyPr>
+          <a:lstStyle/>
+          <a:p>
+            <a:r>
+              <a:rPr sz="1600" b="0">
+                <a:solidFill>
+                  <a:srgbClr val="1F2937"/>
+                </a:solidFill>
+                <a:latin typeface="Microsoft YaHei"/>
+              </a:rPr>
+              <a:t>产品线：{{product_line}}</a:t>
+            </a:r>
+          </a:p>
+        </p:txBody>
+      </p:sp>
+      <p:sp>
+        <p:nvSpPr>
+          <p:cNvPr id="11" name="TextBox 10"/>
+          <p:cNvSpPr txBox="1"/>
+          <p:nvPr/>
+        </p:nvSpPr>
+        <p:spPr>
+          <a:xfrm>
+            <a:off x="822960" y="3520440"/>
+            <a:ext cx="9601200" cy="411480"/>
+          </a:xfrm>
+          <a:prstGeom prst="rect">
+            <a:avLst/>
+          </a:prstGeom>
+          <a:noFill/>
+        </p:spPr>
+        <p:txBody>
+          <a:bodyPr wrap="none">
+            <a:spAutoFit/>
+          </a:bodyPr>
+          <a:lstStyle/>
+          <a:p>
+            <a:r>
+              <a:rPr sz="1600" b="0">
+                <a:solidFill>
+                  <a:srgbClr val="1F2937"/>
+                </a:solidFill>
+                <a:latin typeface="Microsoft YaHei"/>
+              </a:rPr>
+              <a:t>线路名称：{{line_name}}</a:t>
+            </a:r>
+          </a:p>
+        </p:txBody>
+      </p:sp>
+      <p:sp>
+        <p:nvSpPr>
+          <p:cNvPr id="12" name="TextBox 11"/>
+          <p:cNvSpPr txBox="1"/>
+          <p:nvPr/>
+        </p:nvSpPr>
+        <p:spPr>
+          <a:xfrm>
+            <a:off x="822960" y="4023360"/>
+            <a:ext cx="9601200" cy="411480"/>
+          </a:xfrm>
+          <a:prstGeom prst="rect">
+            <a:avLst/>
+          </a:prstGeom>
+          <a:noFill/>
+        </p:spPr>
+        <p:txBody>
+          <a:bodyPr wrap="none">
+            <a:spAutoFit/>
+          </a:bodyPr>
+          <a:lstStyle/>
+          <a:p>
+            <a:r>
+              <a:rPr sz="1600" b="0">
+                <a:solidFill>
+                  <a:srgbClr val="1F2937"/>
+                </a:solidFill>
+                <a:latin typeface="Microsoft YaHei"/>
+              </a:rPr>
+              <a:t>现场痛点：{{site_pain_points}}</a:t>
+            </a:r>
+          </a:p>
+        </p:txBody>
+      </p:sp>
+      <p:sp>
+        <p:nvSpPr>
+          <p:cNvPr id="13" name="TextBox 12"/>
+          <p:cNvSpPr txBox="1"/>
+          <p:nvPr/>
+        </p:nvSpPr>
+        <p:spPr>
+          <a:xfrm>
+            <a:off x="822960" y="4526280"/>
+            <a:ext cx="9601200" cy="411480"/>
+          </a:xfrm>
+          <a:prstGeom prst="rect">
+            <a:avLst/>
+          </a:prstGeom>
+          <a:noFill/>
+        </p:spPr>
+        <p:txBody>
+          <a:bodyPr wrap="none">
+            <a:spAutoFit/>
+          </a:bodyPr>
+          <a:lstStyle/>
+          <a:p>
+            <a:r>
+              <a:rPr sz="1600" b="0">
+                <a:solidFill>
+                  <a:srgbClr val="1F2937"/>
+                </a:solidFill>
+                <a:latin typeface="Microsoft YaHei"/>
+              </a:rPr>
+              <a:t>施工场景：{{construction_scenario}}</a:t>
+            </a:r>
           </a:p>
         </p:txBody>
       </p:sp>
@@ -8815,6 +9644,10 @@
           </a:solidFill>
           <a:ln/>
         </p:spPr>
+        <p:txBody>
+          <a:bodyPr/>
+          <a:p/>
+        </p:txBody>
       </p:sp>
       <p:sp>
         <p:nvSpPr>
@@ -8835,6 +9668,10 @@
           </a:solidFill>
           <a:ln/>
         </p:spPr>
+        <p:txBody>
+          <a:bodyPr/>
+          <a:p/>
+        </p:txBody>
       </p:sp>
       <p:sp>
         <p:nvSpPr>
@@ -8855,6 +9692,10 @@
           </a:solidFill>
           <a:ln/>
         </p:spPr>
+        <p:txBody>
+          <a:bodyPr/>
+          <a:p/>
+        </p:txBody>
       </p:sp>
       <p:sp>
         <p:nvSpPr>
@@ -8875,6 +9716,10 @@
           </a:solidFill>
           <a:ln/>
         </p:spPr>
+        <p:txBody>
+          <a:bodyPr/>
+          <a:p/>
+        </p:txBody>
       </p:sp>
       <p:sp>
         <p:nvSpPr>
@@ -8895,6 +9740,10 @@
           </a:solidFill>
           <a:ln/>
         </p:spPr>
+        <p:txBody>
+          <a:bodyPr/>
+          <a:p/>
+        </p:txBody>
       </p:sp>
       <p:sp>
         <p:nvSpPr>
@@ -9294,6 +10143,10 @@
           </a:solidFill>
           <a:ln/>
         </p:spPr>
+        <p:txBody>
+          <a:bodyPr/>
+          <a:p/>
+        </p:txBody>
       </p:sp>
       <p:sp>
         <p:nvSpPr>
@@ -9314,6 +10167,10 @@
           </a:solidFill>
           <a:ln/>
         </p:spPr>
+        <p:txBody>
+          <a:bodyPr/>
+          <a:p/>
+        </p:txBody>
       </p:sp>
       <p:sp>
         <p:nvSpPr>
@@ -9334,6 +10191,10 @@
           </a:solidFill>
           <a:ln/>
         </p:spPr>
+        <p:txBody>
+          <a:bodyPr/>
+          <a:p/>
+        </p:txBody>
       </p:sp>
       <p:sp>
         <p:nvSpPr>
@@ -9354,6 +10215,10 @@
           </a:solidFill>
           <a:ln/>
         </p:spPr>
+        <p:txBody>
+          <a:bodyPr/>
+          <a:p/>
+        </p:txBody>
       </p:sp>
       <p:sp>
         <p:nvSpPr>
@@ -9671,6 +10536,10 @@
           </a:solidFill>
           <a:ln/>
         </p:spPr>
+        <p:txBody>
+          <a:bodyPr/>
+          <a:p/>
+        </p:txBody>
       </p:sp>
       <p:sp>
         <p:nvSpPr>
@@ -9691,6 +10560,10 @@
           </a:solidFill>
           <a:ln/>
         </p:spPr>
+        <p:txBody>
+          <a:bodyPr/>
+          <a:p/>
+        </p:txBody>
       </p:sp>
       <p:sp>
         <p:nvSpPr>
@@ -9711,6 +10584,10 @@
           </a:solidFill>
           <a:ln/>
         </p:spPr>
+        <p:txBody>
+          <a:bodyPr/>
+          <a:p/>
+        </p:txBody>
       </p:sp>
       <p:sp>
         <p:nvSpPr>
@@ -9731,6 +10608,10 @@
           </a:solidFill>
           <a:ln/>
         </p:spPr>
+        <p:txBody>
+          <a:bodyPr/>
+          <a:p/>
+        </p:txBody>
       </p:sp>
       <p:sp>
         <p:nvSpPr>
@@ -9751,6 +10632,10 @@
           </a:solidFill>
           <a:ln/>
         </p:spPr>
+        <p:txBody>
+          <a:bodyPr/>
+          <a:p/>
+        </p:txBody>
       </p:sp>
       <p:sp>
         <p:nvSpPr>
@@ -10150,6 +11035,10 @@
           </a:solidFill>
           <a:ln/>
         </p:spPr>
+        <p:txBody>
+          <a:bodyPr/>
+          <a:p/>
+        </p:txBody>
       </p:sp>
       <p:sp>
         <p:nvSpPr>
@@ -10170,6 +11059,10 @@
           </a:solidFill>
           <a:ln/>
         </p:spPr>
+        <p:txBody>
+          <a:bodyPr/>
+          <a:p/>
+        </p:txBody>
       </p:sp>
       <p:sp>
         <p:nvSpPr>
@@ -10190,6 +11083,10 @@
           </a:solidFill>
           <a:ln/>
         </p:spPr>
+        <p:txBody>
+          <a:bodyPr/>
+          <a:p/>
+        </p:txBody>
       </p:sp>
       <p:sp>
         <p:nvSpPr>
@@ -10210,6 +11107,10 @@
           </a:solidFill>
           <a:ln/>
         </p:spPr>
+        <p:txBody>
+          <a:bodyPr/>
+          <a:p/>
+        </p:txBody>
       </p:sp>
       <p:sp>
         <p:nvSpPr>
@@ -10682,6 +11583,10 @@
           </a:solidFill>
           <a:ln/>
         </p:spPr>
+        <p:txBody>
+          <a:bodyPr/>
+          <a:p/>
+        </p:txBody>
       </p:sp>
       <p:sp>
         <p:nvSpPr>
@@ -10702,6 +11607,10 @@
           </a:solidFill>
           <a:ln/>
         </p:spPr>
+        <p:txBody>
+          <a:bodyPr/>
+          <a:p/>
+        </p:txBody>
       </p:sp>
       <p:sp>
         <p:nvSpPr>
@@ -10722,6 +11631,10 @@
           </a:solidFill>
           <a:ln/>
         </p:spPr>
+        <p:txBody>
+          <a:bodyPr/>
+          <a:p/>
+        </p:txBody>
       </p:sp>
       <p:sp>
         <p:nvSpPr>
@@ -10742,6 +11655,10 @@
           </a:solidFill>
           <a:ln/>
         </p:spPr>
+        <p:txBody>
+          <a:bodyPr/>
+          <a:p/>
+        </p:txBody>
       </p:sp>
       <p:sp>
         <p:nvSpPr>
@@ -10762,6 +11679,10 @@
           </a:solidFill>
           <a:ln/>
         </p:spPr>
+        <p:txBody>
+          <a:bodyPr/>
+          <a:p/>
+        </p:txBody>
       </p:sp>
       <p:pic>
         <p:nvPicPr>
@@ -11043,6 +11964,10 @@
           </a:solidFill>
           <a:ln/>
         </p:spPr>
+        <p:txBody>
+          <a:bodyPr/>
+          <a:p/>
+        </p:txBody>
       </p:sp>
       <p:sp>
         <p:nvSpPr>
@@ -11063,6 +11988,10 @@
           </a:solidFill>
           <a:ln/>
         </p:spPr>
+        <p:txBody>
+          <a:bodyPr/>
+          <a:p/>
+        </p:txBody>
       </p:sp>
       <p:sp>
         <p:nvSpPr>
@@ -11083,6 +12012,10 @@
           </a:solidFill>
           <a:ln/>
         </p:spPr>
+        <p:txBody>
+          <a:bodyPr/>
+          <a:p/>
+        </p:txBody>
       </p:sp>
       <p:sp>
         <p:nvSpPr>
@@ -11103,6 +12036,10 @@
           </a:solidFill>
           <a:ln/>
         </p:spPr>
+        <p:txBody>
+          <a:bodyPr/>
+          <a:p/>
+        </p:txBody>
       </p:sp>
       <p:sp>
         <p:nvSpPr>
@@ -11123,6 +12060,10 @@
           </a:solidFill>
           <a:ln/>
         </p:spPr>
+        <p:txBody>
+          <a:bodyPr/>
+          <a:p/>
+        </p:txBody>
       </p:sp>
       <p:sp>
         <p:nvSpPr>
@@ -11143,6 +12084,10 @@
           </a:solidFill>
           <a:ln/>
         </p:spPr>
+        <p:txBody>
+          <a:bodyPr/>
+          <a:p/>
+        </p:txBody>
       </p:sp>
       <p:sp>
         <p:nvSpPr>
@@ -11248,6 +12193,10 @@
           </a:solidFill>
           <a:ln/>
         </p:spPr>
+        <p:txBody>
+          <a:bodyPr/>
+          <a:p/>
+        </p:txBody>
       </p:sp>
       <p:sp>
         <p:nvSpPr>
@@ -11268,6 +12217,10 @@
           </a:solidFill>
           <a:ln/>
         </p:spPr>
+        <p:txBody>
+          <a:bodyPr/>
+          <a:p/>
+        </p:txBody>
       </p:sp>
       <p:sp>
         <p:nvSpPr>
@@ -11288,6 +12241,10 @@
           </a:solidFill>
           <a:ln/>
         </p:spPr>
+        <p:txBody>
+          <a:bodyPr/>
+          <a:p/>
+        </p:txBody>
       </p:sp>
       <p:sp>
         <p:nvSpPr>
@@ -11308,6 +12265,10 @@
           </a:solidFill>
           <a:ln/>
         </p:spPr>
+        <p:txBody>
+          <a:bodyPr/>
+          <a:p/>
+        </p:txBody>
       </p:sp>
       <p:sp>
         <p:nvSpPr>
@@ -11328,6 +12289,10 @@
           </a:solidFill>
           <a:ln/>
         </p:spPr>
+        <p:txBody>
+          <a:bodyPr/>
+          <a:p/>
+        </p:txBody>
       </p:sp>
       <p:sp>
         <p:nvSpPr>
@@ -11348,6 +12313,10 @@
           </a:solidFill>
           <a:ln/>
         </p:spPr>
+        <p:txBody>
+          <a:bodyPr/>
+          <a:p/>
+        </p:txBody>
       </p:sp>
       <p:sp>
         <p:nvSpPr>
@@ -11453,6 +12422,10 @@
           </a:solidFill>
           <a:ln/>
         </p:spPr>
+        <p:txBody>
+          <a:bodyPr/>
+          <a:p/>
+        </p:txBody>
       </p:sp>
       <p:sp>
         <p:nvSpPr>
@@ -11473,6 +12446,10 @@
           </a:solidFill>
           <a:ln/>
         </p:spPr>
+        <p:txBody>
+          <a:bodyPr/>
+          <a:p/>
+        </p:txBody>
       </p:sp>
       <p:sp>
         <p:nvSpPr>
@@ -11493,6 +12470,10 @@
           </a:solidFill>
           <a:ln/>
         </p:spPr>
+        <p:txBody>
+          <a:bodyPr/>
+          <a:p/>
+        </p:txBody>
       </p:sp>
       <p:sp>
         <p:nvSpPr>
@@ -11513,6 +12494,10 @@
           </a:solidFill>
           <a:ln/>
         </p:spPr>
+        <p:txBody>
+          <a:bodyPr/>
+          <a:p/>
+        </p:txBody>
       </p:sp>
       <p:sp>
         <p:nvSpPr>
@@ -11533,6 +12518,10 @@
           </a:solidFill>
           <a:ln/>
         </p:spPr>
+        <p:txBody>
+          <a:bodyPr/>
+          <a:p/>
+        </p:txBody>
       </p:sp>
       <p:sp>
         <p:nvSpPr>
@@ -11553,6 +12542,10 @@
           </a:solidFill>
           <a:ln/>
         </p:spPr>
+        <p:txBody>
+          <a:bodyPr/>
+          <a:p/>
+        </p:txBody>
       </p:sp>
       <p:sp>
         <p:nvSpPr>
@@ -11699,6 +12692,10 @@
           </a:solidFill>
           <a:ln/>
         </p:spPr>
+        <p:txBody>
+          <a:bodyPr/>
+          <a:p/>
+        </p:txBody>
       </p:sp>
       <p:sp>
         <p:nvSpPr>
@@ -11719,6 +12716,10 @@
           </a:solidFill>
           <a:ln/>
         </p:spPr>
+        <p:txBody>
+          <a:bodyPr/>
+          <a:p/>
+        </p:txBody>
       </p:sp>
       <p:sp>
         <p:nvSpPr>
@@ -11739,6 +12740,10 @@
           </a:solidFill>
           <a:ln/>
         </p:spPr>
+        <p:txBody>
+          <a:bodyPr/>
+          <a:p/>
+        </p:txBody>
       </p:sp>
       <p:sp>
         <p:nvSpPr>
@@ -11759,6 +12764,10 @@
           </a:solidFill>
           <a:ln/>
         </p:spPr>
+        <p:txBody>
+          <a:bodyPr/>
+          <a:p/>
+        </p:txBody>
       </p:sp>
       <p:sp>
         <p:nvSpPr>
@@ -11779,6 +12788,10 @@
           </a:solidFill>
           <a:ln/>
         </p:spPr>
+        <p:txBody>
+          <a:bodyPr/>
+          <a:p/>
+        </p:txBody>
       </p:sp>
       <p:sp>
         <p:nvSpPr>
@@ -11799,6 +12812,10 @@
           </a:solidFill>
           <a:ln/>
         </p:spPr>
+        <p:txBody>
+          <a:bodyPr/>
+          <a:p/>
+        </p:txBody>
       </p:sp>
       <p:sp>
         <p:nvSpPr>
@@ -11945,6 +12962,10 @@
           </a:solidFill>
           <a:ln/>
         </p:spPr>
+        <p:txBody>
+          <a:bodyPr/>
+          <a:p/>
+        </p:txBody>
       </p:sp>
       <p:sp>
         <p:nvSpPr>
@@ -11965,6 +12986,10 @@
           </a:solidFill>
           <a:ln/>
         </p:spPr>
+        <p:txBody>
+          <a:bodyPr/>
+          <a:p/>
+        </p:txBody>
       </p:sp>
       <p:sp>
         <p:nvSpPr>
@@ -11985,6 +13010,10 @@
           </a:solidFill>
           <a:ln/>
         </p:spPr>
+        <p:txBody>
+          <a:bodyPr/>
+          <a:p/>
+        </p:txBody>
       </p:sp>
       <p:sp>
         <p:nvSpPr>
@@ -12005,6 +13034,10 @@
           </a:solidFill>
           <a:ln/>
         </p:spPr>
+        <p:txBody>
+          <a:bodyPr/>
+          <a:p/>
+        </p:txBody>
       </p:sp>
       <p:sp>
         <p:nvSpPr>
@@ -12025,6 +13058,10 @@
           </a:solidFill>
           <a:ln/>
         </p:spPr>
+        <p:txBody>
+          <a:bodyPr/>
+          <a:p/>
+        </p:txBody>
       </p:sp>
       <p:sp>
         <p:nvSpPr>
@@ -12045,6 +13082,10 @@
           </a:solidFill>
           <a:ln/>
         </p:spPr>
+        <p:txBody>
+          <a:bodyPr/>
+          <a:p/>
+        </p:txBody>
       </p:sp>
       <p:sp>
         <p:nvSpPr>
@@ -12191,6 +13232,10 @@
           </a:solidFill>
           <a:ln/>
         </p:spPr>
+        <p:txBody>
+          <a:bodyPr/>
+          <a:p/>
+        </p:txBody>
       </p:sp>
       <p:sp>
         <p:nvSpPr>
@@ -12211,6 +13256,10 @@
           </a:solidFill>
           <a:ln/>
         </p:spPr>
+        <p:txBody>
+          <a:bodyPr/>
+          <a:p/>
+        </p:txBody>
       </p:sp>
       <p:sp>
         <p:nvSpPr>
@@ -12231,6 +13280,10 @@
           </a:solidFill>
           <a:ln/>
         </p:spPr>
+        <p:txBody>
+          <a:bodyPr/>
+          <a:p/>
+        </p:txBody>
       </p:sp>
       <p:sp>
         <p:nvSpPr>
@@ -12251,6 +13304,10 @@
           </a:solidFill>
           <a:ln/>
         </p:spPr>
+        <p:txBody>
+          <a:bodyPr/>
+          <a:p/>
+        </p:txBody>
       </p:sp>
       <p:sp>
         <p:nvSpPr>
@@ -12271,6 +13328,10 @@
           </a:solidFill>
           <a:ln/>
         </p:spPr>
+        <p:txBody>
+          <a:bodyPr/>
+          <a:p/>
+        </p:txBody>
       </p:sp>
       <p:sp>
         <p:nvSpPr>
@@ -12291,6 +13352,10 @@
           </a:solidFill>
           <a:ln/>
         </p:spPr>
+        <p:txBody>
+          <a:bodyPr/>
+          <a:p/>
+        </p:txBody>
       </p:sp>
       <p:sp>
         <p:nvSpPr>
@@ -12396,6 +13461,10 @@
           </a:solidFill>
           <a:ln/>
         </p:spPr>
+        <p:txBody>
+          <a:bodyPr/>
+          <a:p/>
+        </p:txBody>
       </p:sp>
       <p:sp>
         <p:nvSpPr>
@@ -12416,6 +13485,10 @@
           </a:solidFill>
           <a:ln/>
         </p:spPr>
+        <p:txBody>
+          <a:bodyPr/>
+          <a:p/>
+        </p:txBody>
       </p:sp>
       <p:sp>
         <p:nvSpPr>
@@ -12436,6 +13509,10 @@
           </a:solidFill>
           <a:ln/>
         </p:spPr>
+        <p:txBody>
+          <a:bodyPr/>
+          <a:p/>
+        </p:txBody>
       </p:sp>
       <p:sp>
         <p:nvSpPr>
@@ -12456,6 +13533,10 @@
           </a:solidFill>
           <a:ln/>
         </p:spPr>
+        <p:txBody>
+          <a:bodyPr/>
+          <a:p/>
+        </p:txBody>
       </p:sp>
       <p:sp>
         <p:nvSpPr>
@@ -12476,6 +13557,10 @@
           </a:solidFill>
           <a:ln/>
         </p:spPr>
+        <p:txBody>
+          <a:bodyPr/>
+          <a:p/>
+        </p:txBody>
       </p:sp>
       <p:sp>
         <p:nvSpPr>
@@ -12496,6 +13581,10 @@
           </a:solidFill>
           <a:ln/>
         </p:spPr>
+        <p:txBody>
+          <a:bodyPr/>
+          <a:p/>
+        </p:txBody>
       </p:sp>
       <p:sp>
         <p:nvSpPr>
@@ -12601,6 +13690,10 @@
           </a:solidFill>
           <a:ln/>
         </p:spPr>
+        <p:txBody>
+          <a:bodyPr/>
+          <a:p/>
+        </p:txBody>
       </p:sp>
       <p:sp>
         <p:nvSpPr>
@@ -12621,6 +13714,10 @@
           </a:solidFill>
           <a:ln/>
         </p:spPr>
+        <p:txBody>
+          <a:bodyPr/>
+          <a:p/>
+        </p:txBody>
       </p:sp>
       <p:sp>
         <p:nvSpPr>
@@ -12641,6 +13738,10 @@
           </a:solidFill>
           <a:ln/>
         </p:spPr>
+        <p:txBody>
+          <a:bodyPr/>
+          <a:p/>
+        </p:txBody>
       </p:sp>
       <p:sp>
         <p:nvSpPr>
@@ -12661,6 +13762,10 @@
           </a:solidFill>
           <a:ln/>
         </p:spPr>
+        <p:txBody>
+          <a:bodyPr/>
+          <a:p/>
+        </p:txBody>
       </p:sp>
       <p:sp>
         <p:nvSpPr>
@@ -12681,6 +13786,10 @@
           </a:solidFill>
           <a:ln/>
         </p:spPr>
+        <p:txBody>
+          <a:bodyPr/>
+          <a:p/>
+        </p:txBody>
       </p:sp>
       <p:sp>
         <p:nvSpPr>
@@ -12701,6 +13810,10 @@
           </a:solidFill>
           <a:ln/>
         </p:spPr>
+        <p:txBody>
+          <a:bodyPr/>
+          <a:p/>
+        </p:txBody>
       </p:sp>
       <p:sp>
         <p:nvSpPr>
@@ -12961,6 +14074,10 @@
           </a:solidFill>
           <a:ln/>
         </p:spPr>
+        <p:txBody>
+          <a:bodyPr/>
+          <a:p/>
+        </p:txBody>
       </p:sp>
       <p:sp>
         <p:nvSpPr>
@@ -12981,6 +14098,10 @@
           </a:solidFill>
           <a:ln/>
         </p:spPr>
+        <p:txBody>
+          <a:bodyPr/>
+          <a:p/>
+        </p:txBody>
       </p:sp>
       <p:sp>
         <p:nvSpPr>
@@ -13001,6 +14122,10 @@
           </a:solidFill>
           <a:ln/>
         </p:spPr>
+        <p:txBody>
+          <a:bodyPr/>
+          <a:p/>
+        </p:txBody>
       </p:sp>
       <p:sp>
         <p:nvSpPr>
@@ -13021,6 +14146,10 @@
           </a:solidFill>
           <a:ln/>
         </p:spPr>
+        <p:txBody>
+          <a:bodyPr/>
+          <a:p/>
+        </p:txBody>
       </p:sp>
       <p:sp>
         <p:nvSpPr>
@@ -13041,6 +14170,10 @@
           </a:solidFill>
           <a:ln/>
         </p:spPr>
+        <p:txBody>
+          <a:bodyPr/>
+          <a:p/>
+        </p:txBody>
       </p:sp>
       <p:sp>
         <p:nvSpPr>
@@ -13061,6 +14194,10 @@
           </a:solidFill>
           <a:ln/>
         </p:spPr>
+        <p:txBody>
+          <a:bodyPr/>
+          <a:p/>
+        </p:txBody>
       </p:sp>
       <p:sp>
         <p:nvSpPr>
@@ -13298,6 +14435,10 @@
           </a:solidFill>
           <a:ln/>
         </p:spPr>
+        <p:txBody>
+          <a:bodyPr/>
+          <a:p/>
+        </p:txBody>
       </p:sp>
       <p:sp>
         <p:nvSpPr>
@@ -13318,6 +14459,10 @@
           </a:solidFill>
           <a:ln/>
         </p:spPr>
+        <p:txBody>
+          <a:bodyPr/>
+          <a:p/>
+        </p:txBody>
       </p:sp>
       <p:sp>
         <p:nvSpPr>
@@ -13338,6 +14483,10 @@
           </a:solidFill>
           <a:ln/>
         </p:spPr>
+        <p:txBody>
+          <a:bodyPr/>
+          <a:p/>
+        </p:txBody>
       </p:sp>
       <p:sp>
         <p:nvSpPr>
@@ -13358,6 +14507,10 @@
           </a:solidFill>
           <a:ln/>
         </p:spPr>
+        <p:txBody>
+          <a:bodyPr/>
+          <a:p/>
+        </p:txBody>
       </p:sp>
       <p:sp>
         <p:nvSpPr>
@@ -13378,6 +14531,10 @@
           </a:solidFill>
           <a:ln/>
         </p:spPr>
+        <p:txBody>
+          <a:bodyPr/>
+          <a:p/>
+        </p:txBody>
       </p:sp>
       <p:sp>
         <p:nvSpPr>
@@ -13398,6 +14555,10 @@
           </a:solidFill>
           <a:ln/>
         </p:spPr>
+        <p:txBody>
+          <a:bodyPr/>
+          <a:p/>
+        </p:txBody>
       </p:sp>
       <p:sp>
         <p:nvSpPr>
@@ -13790,6 +14951,10 @@
           </a:solidFill>
           <a:ln/>
         </p:spPr>
+        <p:txBody>
+          <a:bodyPr/>
+          <a:p/>
+        </p:txBody>
       </p:sp>
       <p:sp>
         <p:nvSpPr>
@@ -13810,6 +14975,10 @@
           </a:solidFill>
           <a:ln/>
         </p:spPr>
+        <p:txBody>
+          <a:bodyPr/>
+          <a:p/>
+        </p:txBody>
       </p:sp>
       <p:sp>
         <p:nvSpPr>
@@ -13830,6 +14999,10 @@
           </a:solidFill>
           <a:ln/>
         </p:spPr>
+        <p:txBody>
+          <a:bodyPr/>
+          <a:p/>
+        </p:txBody>
       </p:sp>
       <p:sp>
         <p:nvSpPr>
@@ -13850,6 +15023,10 @@
           </a:solidFill>
           <a:ln/>
         </p:spPr>
+        <p:txBody>
+          <a:bodyPr/>
+          <a:p/>
+        </p:txBody>
       </p:sp>
       <p:sp>
         <p:nvSpPr>
@@ -13870,6 +15047,10 @@
           </a:solidFill>
           <a:ln/>
         </p:spPr>
+        <p:txBody>
+          <a:bodyPr/>
+          <a:p/>
+        </p:txBody>
       </p:sp>
       <p:sp>
         <p:nvSpPr>
@@ -13895,6 +15076,10 @@
             <a:prstDash val="solid"/>
           </a:ln>
         </p:spPr>
+        <p:txBody>
+          <a:bodyPr/>
+          <a:p/>
+        </p:txBody>
       </p:sp>
       <p:sp>
         <p:nvSpPr>
@@ -14085,6 +15270,10 @@
           </a:solidFill>
           <a:ln/>
         </p:spPr>
+        <p:txBody>
+          <a:bodyPr/>
+          <a:p/>
+        </p:txBody>
       </p:sp>
       <p:sp>
         <p:nvSpPr>
@@ -14105,6 +15294,10 @@
           </a:solidFill>
           <a:ln/>
         </p:spPr>
+        <p:txBody>
+          <a:bodyPr/>
+          <a:p/>
+        </p:txBody>
       </p:sp>
       <p:sp>
         <p:nvSpPr>
@@ -14125,6 +15318,10 @@
           </a:solidFill>
           <a:ln/>
         </p:spPr>
+        <p:txBody>
+          <a:bodyPr/>
+          <a:p/>
+        </p:txBody>
       </p:sp>
       <p:sp>
         <p:nvSpPr>
@@ -14145,6 +15342,10 @@
           </a:solidFill>
           <a:ln/>
         </p:spPr>
+        <p:txBody>
+          <a:bodyPr/>
+          <a:p/>
+        </p:txBody>
       </p:sp>
       <p:sp>
         <p:nvSpPr>
@@ -14165,6 +15366,10 @@
           </a:solidFill>
           <a:ln/>
         </p:spPr>
+        <p:txBody>
+          <a:bodyPr/>
+          <a:p/>
+        </p:txBody>
       </p:sp>
       <p:sp>
         <p:nvSpPr>
@@ -14190,6 +15395,10 @@
             <a:prstDash val="solid"/>
           </a:ln>
         </p:spPr>
+        <p:txBody>
+          <a:bodyPr/>
+          <a:p/>
+        </p:txBody>
       </p:sp>
       <p:sp>
         <p:nvSpPr>
@@ -14380,6 +15589,10 @@
           </a:solidFill>
           <a:ln/>
         </p:spPr>
+        <p:txBody>
+          <a:bodyPr/>
+          <a:p/>
+        </p:txBody>
       </p:sp>
       <p:sp>
         <p:nvSpPr>
@@ -14400,6 +15613,10 @@
           </a:solidFill>
           <a:ln/>
         </p:spPr>
+        <p:txBody>
+          <a:bodyPr/>
+          <a:p/>
+        </p:txBody>
       </p:sp>
       <p:sp>
         <p:nvSpPr>
@@ -14420,6 +15637,10 @@
           </a:solidFill>
           <a:ln/>
         </p:spPr>
+        <p:txBody>
+          <a:bodyPr/>
+          <a:p/>
+        </p:txBody>
       </p:sp>
       <p:sp>
         <p:nvSpPr>
@@ -14440,6 +15661,10 @@
           </a:solidFill>
           <a:ln/>
         </p:spPr>
+        <p:txBody>
+          <a:bodyPr/>
+          <a:p/>
+        </p:txBody>
       </p:sp>
       <p:sp>
         <p:nvSpPr>
@@ -14460,6 +15685,10 @@
           </a:solidFill>
           <a:ln/>
         </p:spPr>
+        <p:txBody>
+          <a:bodyPr/>
+          <a:p/>
+        </p:txBody>
       </p:sp>
       <p:sp>
         <p:nvSpPr>
@@ -14485,6 +15714,10 @@
             <a:prstDash val="solid"/>
           </a:ln>
         </p:spPr>
+        <p:txBody>
+          <a:bodyPr/>
+          <a:p/>
+        </p:txBody>
       </p:sp>
       <p:sp>
         <p:nvSpPr>
@@ -14871,6 +16104,10 @@
           </a:solidFill>
           <a:ln/>
         </p:spPr>
+        <p:txBody>
+          <a:bodyPr/>
+          <a:p/>
+        </p:txBody>
       </p:sp>
       <p:sp>
         <p:nvSpPr>
@@ -14998,6 +16235,10 @@
           </a:solidFill>
           <a:ln/>
         </p:spPr>
+        <p:txBody>
+          <a:bodyPr/>
+          <a:p/>
+        </p:txBody>
       </p:sp>
       <p:sp>
         <p:nvSpPr>
@@ -15125,6 +16366,10 @@
           </a:solidFill>
           <a:ln/>
         </p:spPr>
+        <p:txBody>
+          <a:bodyPr/>
+          <a:p/>
+        </p:txBody>
       </p:sp>
       <p:sp>
         <p:nvSpPr>
@@ -15145,6 +16390,10 @@
           </a:solidFill>
           <a:ln/>
         </p:spPr>
+        <p:txBody>
+          <a:bodyPr/>
+          <a:p/>
+        </p:txBody>
       </p:sp>
       <p:sp>
         <p:nvSpPr>
@@ -15165,6 +16414,10 @@
           </a:solidFill>
           <a:ln/>
         </p:spPr>
+        <p:txBody>
+          <a:bodyPr/>
+          <a:p/>
+        </p:txBody>
       </p:sp>
       <p:sp>
         <p:nvSpPr>
@@ -15185,6 +16438,10 @@
           </a:solidFill>
           <a:ln/>
         </p:spPr>
+        <p:txBody>
+          <a:bodyPr/>
+          <a:p/>
+        </p:txBody>
       </p:sp>
       <p:sp>
         <p:nvSpPr>
@@ -15205,6 +16462,10 @@
           </a:solidFill>
           <a:ln/>
         </p:spPr>
+        <p:txBody>
+          <a:bodyPr/>
+          <a:p/>
+        </p:txBody>
       </p:sp>
       <p:sp>
         <p:nvSpPr>
@@ -15462,6 +16723,10 @@
           </a:solidFill>
           <a:ln/>
         </p:spPr>
+        <p:txBody>
+          <a:bodyPr/>
+          <a:p/>
+        </p:txBody>
       </p:sp>
       <p:sp>
         <p:nvSpPr>
@@ -15482,6 +16747,10 @@
           </a:solidFill>
           <a:ln/>
         </p:spPr>
+        <p:txBody>
+          <a:bodyPr/>
+          <a:p/>
+        </p:txBody>
       </p:sp>
       <p:sp>
         <p:nvSpPr>
@@ -15502,6 +16771,10 @@
           </a:solidFill>
           <a:ln/>
         </p:spPr>
+        <p:txBody>
+          <a:bodyPr/>
+          <a:p/>
+        </p:txBody>
       </p:sp>
       <p:sp>
         <p:nvSpPr>
@@ -15522,6 +16795,10 @@
           </a:solidFill>
           <a:ln/>
         </p:spPr>
+        <p:txBody>
+          <a:bodyPr/>
+          <a:p/>
+        </p:txBody>
       </p:sp>
       <p:sp>
         <p:nvSpPr>
@@ -15542,6 +16819,10 @@
           </a:solidFill>
           <a:ln/>
         </p:spPr>
+        <p:txBody>
+          <a:bodyPr/>
+          <a:p/>
+        </p:txBody>
       </p:sp>
       <p:pic>
         <p:nvPicPr>
@@ -15823,6 +17104,10 @@
           </a:solidFill>
           <a:ln/>
         </p:spPr>
+        <p:txBody>
+          <a:bodyPr/>
+          <a:p/>
+        </p:txBody>
       </p:sp>
       <p:sp>
         <p:nvSpPr>
@@ -15843,6 +17128,10 @@
           </a:solidFill>
           <a:ln/>
         </p:spPr>
+        <p:txBody>
+          <a:bodyPr/>
+          <a:p/>
+        </p:txBody>
       </p:sp>
       <p:sp>
         <p:nvSpPr>
@@ -15863,6 +17152,10 @@
           </a:solidFill>
           <a:ln/>
         </p:spPr>
+        <p:txBody>
+          <a:bodyPr/>
+          <a:p/>
+        </p:txBody>
       </p:sp>
       <p:sp>
         <p:nvSpPr>
@@ -15883,6 +17176,10 @@
           </a:solidFill>
           <a:ln/>
         </p:spPr>
+        <p:txBody>
+          <a:bodyPr/>
+          <a:p/>
+        </p:txBody>
       </p:sp>
       <p:sp>
         <p:nvSpPr>
@@ -15903,6 +17200,10 @@
           </a:solidFill>
           <a:ln/>
         </p:spPr>
+        <p:txBody>
+          <a:bodyPr/>
+          <a:p/>
+        </p:txBody>
       </p:sp>
       <p:sp>
         <p:nvSpPr>
@@ -16011,6 +17312,10 @@
           </a:solidFill>
           <a:ln/>
         </p:spPr>
+        <p:txBody>
+          <a:bodyPr/>
+          <a:p/>
+        </p:txBody>
       </p:sp>
       <p:sp>
         <p:nvSpPr>
@@ -16031,6 +17336,10 @@
           </a:solidFill>
           <a:ln/>
         </p:spPr>
+        <p:txBody>
+          <a:bodyPr/>
+          <a:p/>
+        </p:txBody>
       </p:sp>
       <p:sp>
         <p:nvSpPr>
@@ -16051,6 +17360,10 @@
           </a:solidFill>
           <a:ln/>
         </p:spPr>
+        <p:txBody>
+          <a:bodyPr/>
+          <a:p/>
+        </p:txBody>
       </p:sp>
       <p:sp>
         <p:nvSpPr>
@@ -16071,6 +17384,10 @@
           </a:solidFill>
           <a:ln/>
         </p:spPr>
+        <p:txBody>
+          <a:bodyPr/>
+          <a:p/>
+        </p:txBody>
       </p:sp>
       <p:sp>
         <p:nvSpPr>
@@ -16091,6 +17408,10 @@
           </a:solidFill>
           <a:ln/>
         </p:spPr>
+        <p:txBody>
+          <a:bodyPr/>
+          <a:p/>
+        </p:txBody>
       </p:sp>
       <p:pic>
         <p:nvPicPr>

--- a/ppt_engine/templates/solution_fixed_modules/铁路声屏障行业背景与技术发展（M1_&_M2）.pptx
+++ b/ppt_engine/templates/solution_fixed_modules/铁路声屏障行业背景与技术发展（M1_&_M2）.pptx
@@ -5,10 +5,10 @@
     <p:sldMasterId id="2147483648" r:id="rId1"/>
   </p:sldMasterIdLst>
   <p:notesMasterIdLst>
-    <p:notesMasterId r:id="rId19"/>
+    <p:notesMasterId r:id="rId18"/>
   </p:notesMasterIdLst>
   <p:handoutMasterIdLst>
-    <p:handoutMasterId r:id="rId20"/>
+    <p:handoutMasterId r:id="rId19"/>
   </p:handoutMasterIdLst>
   <p:sldIdLst>
     <p:sldId id="256" r:id="rId2"/>
@@ -27,12 +27,11 @@
     <p:sldId id="269" r:id="rId15"/>
     <p:sldId id="270" r:id="rId16"/>
     <p:sldId id="271" r:id="rId17"/>
-    <p:sldId id="272" r:id="rId18"/>
   </p:sldIdLst>
   <p:sldSz cx="11522075" cy="6480175"/>
   <p:notesSz cx="6797675" cy="9926638"/>
   <p:custDataLst>
-    <p:tags r:id="rId21"/>
+    <p:tags r:id="rId20"/>
   </p:custDataLst>
   <p:defaultTextStyle>
     <a:defPPr>
@@ -4196,6 +4195,117 @@
           </a:p>
         </p:txBody>
       </p:sp>
+      <p:grpSp>
+        <p:nvGrpSpPr>
+          <p:cNvPr id="2" name="组合 1">
+            <a:extLst>
+              <a:ext uri="{FF2B5EF4-FFF2-40B4-BE49-F238E27FC236}">
+                <a16:creationId xmlns:a16="http://schemas.microsoft.com/office/drawing/2014/main" id="{1651347A-2FE1-0922-0CB2-A90DA25DC959}"/>
+              </a:ext>
+            </a:extLst>
+          </p:cNvPr>
+          <p:cNvGrpSpPr/>
+          <p:nvPr/>
+        </p:nvGrpSpPr>
+        <p:grpSpPr>
+          <a:xfrm>
+            <a:off x="9577302" y="215877"/>
+            <a:ext cx="1695878" cy="706616"/>
+            <a:chOff x="9577302" y="1165376"/>
+            <a:chExt cx="1695878" cy="706616"/>
+          </a:xfrm>
+          <a:solidFill>
+            <a:schemeClr val="bg1"/>
+          </a:solidFill>
+        </p:grpSpPr>
+        <p:sp>
+          <p:nvSpPr>
+            <p:cNvPr id="3" name="矩形 2">
+              <a:extLst>
+                <a:ext uri="{FF2B5EF4-FFF2-40B4-BE49-F238E27FC236}">
+                  <a16:creationId xmlns:a16="http://schemas.microsoft.com/office/drawing/2014/main" id="{8171F3AA-D02D-119F-410B-2DFEEE63786A}"/>
+                </a:ext>
+              </a:extLst>
+            </p:cNvPr>
+            <p:cNvSpPr/>
+            <p:nvPr/>
+          </p:nvSpPr>
+          <p:spPr>
+            <a:xfrm>
+              <a:off x="9721312" y="1295952"/>
+              <a:ext cx="1440100" cy="432030"/>
+            </a:xfrm>
+            <a:prstGeom prst="rect">
+              <a:avLst/>
+            </a:prstGeom>
+            <a:grpFill/>
+            <a:ln>
+              <a:noFill/>
+            </a:ln>
+          </p:spPr>
+          <p:style>
+            <a:lnRef idx="2">
+              <a:schemeClr val="accent1">
+                <a:shade val="15000"/>
+              </a:schemeClr>
+            </a:lnRef>
+            <a:fillRef idx="1">
+              <a:schemeClr val="accent1"/>
+            </a:fillRef>
+            <a:effectRef idx="0">
+              <a:schemeClr val="accent1"/>
+            </a:effectRef>
+            <a:fontRef idx="minor">
+              <a:schemeClr val="lt1"/>
+            </a:fontRef>
+          </p:style>
+          <p:txBody>
+            <a:bodyPr rtlCol="0" anchor="ctr"/>
+            <a:lstStyle/>
+            <a:p>
+              <a:pPr algn="ctr"/>
+              <a:endParaRPr lang="zh-CN" altLang="en-US"/>
+            </a:p>
+          </p:txBody>
+        </p:sp>
+        <p:pic>
+          <p:nvPicPr>
+            <p:cNvPr id="9" name="图片 8">
+              <a:extLst>
+                <a:ext uri="{FF2B5EF4-FFF2-40B4-BE49-F238E27FC236}">
+                  <a16:creationId xmlns:a16="http://schemas.microsoft.com/office/drawing/2014/main" id="{FE1CFCC5-8AF0-0052-69F5-3820BAD0253E}"/>
+                </a:ext>
+              </a:extLst>
+            </p:cNvPr>
+            <p:cNvPicPr>
+              <a:picLocks noChangeAspect="1"/>
+            </p:cNvPicPr>
+            <p:nvPr/>
+          </p:nvPicPr>
+          <p:blipFill>
+            <a:blip r:embed="rId4">
+              <a:extLst>
+                <a:ext uri="{28A0092B-C50C-407E-A947-70E740481C1C}">
+                  <a14:useLocalDpi xmlns:a14="http://schemas.microsoft.com/office/drawing/2010/main" val="0"/>
+                </a:ext>
+              </a:extLst>
+            </a:blip>
+            <a:stretch>
+              <a:fillRect/>
+            </a:stretch>
+          </p:blipFill>
+          <p:spPr>
+            <a:xfrm>
+              <a:off x="9577302" y="1165376"/>
+              <a:ext cx="1695878" cy="706616"/>
+            </a:xfrm>
+            <a:prstGeom prst="rect">
+              <a:avLst/>
+            </a:prstGeom>
+            <a:grpFill/>
+          </p:spPr>
+        </p:pic>
+      </p:grpSp>
     </p:spTree>
   </p:cSld>
   <p:clrMapOvr>
@@ -5435,6 +5545,117 @@
           </a:p>
         </p:txBody>
       </p:sp>
+      <p:grpSp>
+        <p:nvGrpSpPr>
+          <p:cNvPr id="2" name="组合 1">
+            <a:extLst>
+              <a:ext uri="{FF2B5EF4-FFF2-40B4-BE49-F238E27FC236}">
+                <a16:creationId xmlns:a16="http://schemas.microsoft.com/office/drawing/2014/main" id="{48AB0D47-629A-B6AE-AA14-21175D7F479D}"/>
+              </a:ext>
+            </a:extLst>
+          </p:cNvPr>
+          <p:cNvGrpSpPr/>
+          <p:nvPr/>
+        </p:nvGrpSpPr>
+        <p:grpSpPr>
+          <a:xfrm>
+            <a:off x="9577302" y="215877"/>
+            <a:ext cx="1695878" cy="706616"/>
+            <a:chOff x="9577302" y="1165376"/>
+            <a:chExt cx="1695878" cy="706616"/>
+          </a:xfrm>
+          <a:solidFill>
+            <a:schemeClr val="bg1"/>
+          </a:solidFill>
+        </p:grpSpPr>
+        <p:sp>
+          <p:nvSpPr>
+            <p:cNvPr id="3" name="矩形 2">
+              <a:extLst>
+                <a:ext uri="{FF2B5EF4-FFF2-40B4-BE49-F238E27FC236}">
+                  <a16:creationId xmlns:a16="http://schemas.microsoft.com/office/drawing/2014/main" id="{190D6C8A-D7D3-5217-4D8E-4D1A9D54C00E}"/>
+                </a:ext>
+              </a:extLst>
+            </p:cNvPr>
+            <p:cNvSpPr/>
+            <p:nvPr/>
+          </p:nvSpPr>
+          <p:spPr>
+            <a:xfrm>
+              <a:off x="9721312" y="1295952"/>
+              <a:ext cx="1440100" cy="432030"/>
+            </a:xfrm>
+            <a:prstGeom prst="rect">
+              <a:avLst/>
+            </a:prstGeom>
+            <a:grpFill/>
+            <a:ln>
+              <a:noFill/>
+            </a:ln>
+          </p:spPr>
+          <p:style>
+            <a:lnRef idx="2">
+              <a:schemeClr val="accent1">
+                <a:shade val="15000"/>
+              </a:schemeClr>
+            </a:lnRef>
+            <a:fillRef idx="1">
+              <a:schemeClr val="accent1"/>
+            </a:fillRef>
+            <a:effectRef idx="0">
+              <a:schemeClr val="accent1"/>
+            </a:effectRef>
+            <a:fontRef idx="minor">
+              <a:schemeClr val="lt1"/>
+            </a:fontRef>
+          </p:style>
+          <p:txBody>
+            <a:bodyPr rtlCol="0" anchor="ctr"/>
+            <a:lstStyle/>
+            <a:p>
+              <a:pPr algn="ctr"/>
+              <a:endParaRPr lang="zh-CN" altLang="en-US"/>
+            </a:p>
+          </p:txBody>
+        </p:sp>
+        <p:pic>
+          <p:nvPicPr>
+            <p:cNvPr id="35" name="图片 34">
+              <a:extLst>
+                <a:ext uri="{FF2B5EF4-FFF2-40B4-BE49-F238E27FC236}">
+                  <a16:creationId xmlns:a16="http://schemas.microsoft.com/office/drawing/2014/main" id="{95254D42-83DA-E56E-79FC-D4B2A9DEB106}"/>
+                </a:ext>
+              </a:extLst>
+            </p:cNvPr>
+            <p:cNvPicPr>
+              <a:picLocks noChangeAspect="1"/>
+            </p:cNvPicPr>
+            <p:nvPr/>
+          </p:nvPicPr>
+          <p:blipFill>
+            <a:blip r:embed="rId4">
+              <a:extLst>
+                <a:ext uri="{28A0092B-C50C-407E-A947-70E740481C1C}">
+                  <a14:useLocalDpi xmlns:a14="http://schemas.microsoft.com/office/drawing/2010/main" val="0"/>
+                </a:ext>
+              </a:extLst>
+            </a:blip>
+            <a:stretch>
+              <a:fillRect/>
+            </a:stretch>
+          </p:blipFill>
+          <p:spPr>
+            <a:xfrm>
+              <a:off x="9577302" y="1165376"/>
+              <a:ext cx="1695878" cy="706616"/>
+            </a:xfrm>
+            <a:prstGeom prst="rect">
+              <a:avLst/>
+            </a:prstGeom>
+            <a:grpFill/>
+          </p:spPr>
+        </p:pic>
+      </p:grpSp>
     </p:spTree>
   </p:cSld>
   <p:clrMapOvr>
@@ -6450,6 +6671,117 @@
           </a:p>
         </p:txBody>
       </p:sp>
+      <p:grpSp>
+        <p:nvGrpSpPr>
+          <p:cNvPr id="2" name="组合 1">
+            <a:extLst>
+              <a:ext uri="{FF2B5EF4-FFF2-40B4-BE49-F238E27FC236}">
+                <a16:creationId xmlns:a16="http://schemas.microsoft.com/office/drawing/2014/main" id="{E82E6B33-1470-FB2E-B4A2-E884A648E3E5}"/>
+              </a:ext>
+            </a:extLst>
+          </p:cNvPr>
+          <p:cNvGrpSpPr/>
+          <p:nvPr/>
+        </p:nvGrpSpPr>
+        <p:grpSpPr>
+          <a:xfrm>
+            <a:off x="9577302" y="215877"/>
+            <a:ext cx="1695878" cy="706616"/>
+            <a:chOff x="9577302" y="1165376"/>
+            <a:chExt cx="1695878" cy="706616"/>
+          </a:xfrm>
+          <a:solidFill>
+            <a:schemeClr val="bg1"/>
+          </a:solidFill>
+        </p:grpSpPr>
+        <p:sp>
+          <p:nvSpPr>
+            <p:cNvPr id="3" name="矩形 2">
+              <a:extLst>
+                <a:ext uri="{FF2B5EF4-FFF2-40B4-BE49-F238E27FC236}">
+                  <a16:creationId xmlns:a16="http://schemas.microsoft.com/office/drawing/2014/main" id="{776AE06A-6DE8-944B-4272-32ADC1F79B2F}"/>
+                </a:ext>
+              </a:extLst>
+            </p:cNvPr>
+            <p:cNvSpPr/>
+            <p:nvPr/>
+          </p:nvSpPr>
+          <p:spPr>
+            <a:xfrm>
+              <a:off x="9721312" y="1295952"/>
+              <a:ext cx="1440100" cy="432030"/>
+            </a:xfrm>
+            <a:prstGeom prst="rect">
+              <a:avLst/>
+            </a:prstGeom>
+            <a:grpFill/>
+            <a:ln>
+              <a:noFill/>
+            </a:ln>
+          </p:spPr>
+          <p:style>
+            <a:lnRef idx="2">
+              <a:schemeClr val="accent1">
+                <a:shade val="15000"/>
+              </a:schemeClr>
+            </a:lnRef>
+            <a:fillRef idx="1">
+              <a:schemeClr val="accent1"/>
+            </a:fillRef>
+            <a:effectRef idx="0">
+              <a:schemeClr val="accent1"/>
+            </a:effectRef>
+            <a:fontRef idx="minor">
+              <a:schemeClr val="lt1"/>
+            </a:fontRef>
+          </p:style>
+          <p:txBody>
+            <a:bodyPr rtlCol="0" anchor="ctr"/>
+            <a:lstStyle/>
+            <a:p>
+              <a:pPr algn="ctr"/>
+              <a:endParaRPr lang="zh-CN" altLang="en-US"/>
+            </a:p>
+          </p:txBody>
+        </p:sp>
+        <p:pic>
+          <p:nvPicPr>
+            <p:cNvPr id="31" name="图片 30">
+              <a:extLst>
+                <a:ext uri="{FF2B5EF4-FFF2-40B4-BE49-F238E27FC236}">
+                  <a16:creationId xmlns:a16="http://schemas.microsoft.com/office/drawing/2014/main" id="{75F2531A-4161-EF3A-9BD4-9D7E3657A8FF}"/>
+                </a:ext>
+              </a:extLst>
+            </p:cNvPr>
+            <p:cNvPicPr>
+              <a:picLocks noChangeAspect="1"/>
+            </p:cNvPicPr>
+            <p:nvPr/>
+          </p:nvPicPr>
+          <p:blipFill>
+            <a:blip r:embed="rId4">
+              <a:extLst>
+                <a:ext uri="{28A0092B-C50C-407E-A947-70E740481C1C}">
+                  <a14:useLocalDpi xmlns:a14="http://schemas.microsoft.com/office/drawing/2010/main" val="0"/>
+                </a:ext>
+              </a:extLst>
+            </a:blip>
+            <a:stretch>
+              <a:fillRect/>
+            </a:stretch>
+          </p:blipFill>
+          <p:spPr>
+            <a:xfrm>
+              <a:off x="9577302" y="1165376"/>
+              <a:ext cx="1695878" cy="706616"/>
+            </a:xfrm>
+            <a:prstGeom prst="rect">
+              <a:avLst/>
+            </a:prstGeom>
+            <a:grpFill/>
+          </p:spPr>
+        </p:pic>
+      </p:grpSp>
     </p:spTree>
   </p:cSld>
   <p:clrMapOvr>
@@ -7405,6 +7737,117 @@
           </a:p>
         </p:txBody>
       </p:sp>
+      <p:grpSp>
+        <p:nvGrpSpPr>
+          <p:cNvPr id="2" name="组合 1">
+            <a:extLst>
+              <a:ext uri="{FF2B5EF4-FFF2-40B4-BE49-F238E27FC236}">
+                <a16:creationId xmlns:a16="http://schemas.microsoft.com/office/drawing/2014/main" id="{15A91DE5-3902-9F8C-0220-6F5BDCDEE146}"/>
+              </a:ext>
+            </a:extLst>
+          </p:cNvPr>
+          <p:cNvGrpSpPr/>
+          <p:nvPr/>
+        </p:nvGrpSpPr>
+        <p:grpSpPr>
+          <a:xfrm>
+            <a:off x="9577302" y="215877"/>
+            <a:ext cx="1695878" cy="706616"/>
+            <a:chOff x="9577302" y="1165376"/>
+            <a:chExt cx="1695878" cy="706616"/>
+          </a:xfrm>
+          <a:solidFill>
+            <a:schemeClr val="bg1"/>
+          </a:solidFill>
+        </p:grpSpPr>
+        <p:sp>
+          <p:nvSpPr>
+            <p:cNvPr id="3" name="矩形 2">
+              <a:extLst>
+                <a:ext uri="{FF2B5EF4-FFF2-40B4-BE49-F238E27FC236}">
+                  <a16:creationId xmlns:a16="http://schemas.microsoft.com/office/drawing/2014/main" id="{5837B06F-F875-714E-9F36-BB941CC76D6E}"/>
+                </a:ext>
+              </a:extLst>
+            </p:cNvPr>
+            <p:cNvSpPr/>
+            <p:nvPr/>
+          </p:nvSpPr>
+          <p:spPr>
+            <a:xfrm>
+              <a:off x="9721312" y="1295952"/>
+              <a:ext cx="1440100" cy="432030"/>
+            </a:xfrm>
+            <a:prstGeom prst="rect">
+              <a:avLst/>
+            </a:prstGeom>
+            <a:grpFill/>
+            <a:ln>
+              <a:noFill/>
+            </a:ln>
+          </p:spPr>
+          <p:style>
+            <a:lnRef idx="2">
+              <a:schemeClr val="accent1">
+                <a:shade val="15000"/>
+              </a:schemeClr>
+            </a:lnRef>
+            <a:fillRef idx="1">
+              <a:schemeClr val="accent1"/>
+            </a:fillRef>
+            <a:effectRef idx="0">
+              <a:schemeClr val="accent1"/>
+            </a:effectRef>
+            <a:fontRef idx="minor">
+              <a:schemeClr val="lt1"/>
+            </a:fontRef>
+          </p:style>
+          <p:txBody>
+            <a:bodyPr rtlCol="0" anchor="ctr"/>
+            <a:lstStyle/>
+            <a:p>
+              <a:pPr algn="ctr"/>
+              <a:endParaRPr lang="zh-CN" altLang="en-US"/>
+            </a:p>
+          </p:txBody>
+        </p:sp>
+        <p:pic>
+          <p:nvPicPr>
+            <p:cNvPr id="29" name="图片 28">
+              <a:extLst>
+                <a:ext uri="{FF2B5EF4-FFF2-40B4-BE49-F238E27FC236}">
+                  <a16:creationId xmlns:a16="http://schemas.microsoft.com/office/drawing/2014/main" id="{E606E43D-8AA0-4265-446A-F2886605C39F}"/>
+                </a:ext>
+              </a:extLst>
+            </p:cNvPr>
+            <p:cNvPicPr>
+              <a:picLocks noChangeAspect="1"/>
+            </p:cNvPicPr>
+            <p:nvPr/>
+          </p:nvPicPr>
+          <p:blipFill>
+            <a:blip r:embed="rId4">
+              <a:extLst>
+                <a:ext uri="{28A0092B-C50C-407E-A947-70E740481C1C}">
+                  <a14:useLocalDpi xmlns:a14="http://schemas.microsoft.com/office/drawing/2010/main" val="0"/>
+                </a:ext>
+              </a:extLst>
+            </a:blip>
+            <a:stretch>
+              <a:fillRect/>
+            </a:stretch>
+          </p:blipFill>
+          <p:spPr>
+            <a:xfrm>
+              <a:off x="9577302" y="1165376"/>
+              <a:ext cx="1695878" cy="706616"/>
+            </a:xfrm>
+            <a:prstGeom prst="rect">
+              <a:avLst/>
+            </a:prstGeom>
+            <a:grpFill/>
+          </p:spPr>
+        </p:pic>
+      </p:grpSp>
     </p:spTree>
   </p:cSld>
   <p:clrMapOvr>
@@ -8344,6 +8787,117 @@
           </a:p>
         </p:txBody>
       </p:sp>
+      <p:grpSp>
+        <p:nvGrpSpPr>
+          <p:cNvPr id="2" name="组合 1">
+            <a:extLst>
+              <a:ext uri="{FF2B5EF4-FFF2-40B4-BE49-F238E27FC236}">
+                <a16:creationId xmlns:a16="http://schemas.microsoft.com/office/drawing/2014/main" id="{004DA8D0-B4C1-9B88-EE25-7E5F0523B88B}"/>
+              </a:ext>
+            </a:extLst>
+          </p:cNvPr>
+          <p:cNvGrpSpPr/>
+          <p:nvPr/>
+        </p:nvGrpSpPr>
+        <p:grpSpPr>
+          <a:xfrm>
+            <a:off x="9577302" y="215877"/>
+            <a:ext cx="1695878" cy="706616"/>
+            <a:chOff x="9577302" y="1165376"/>
+            <a:chExt cx="1695878" cy="706616"/>
+          </a:xfrm>
+          <a:solidFill>
+            <a:schemeClr val="bg1"/>
+          </a:solidFill>
+        </p:grpSpPr>
+        <p:sp>
+          <p:nvSpPr>
+            <p:cNvPr id="3" name="矩形 2">
+              <a:extLst>
+                <a:ext uri="{FF2B5EF4-FFF2-40B4-BE49-F238E27FC236}">
+                  <a16:creationId xmlns:a16="http://schemas.microsoft.com/office/drawing/2014/main" id="{D4E50AAB-98D6-C20E-4906-5222E3351782}"/>
+                </a:ext>
+              </a:extLst>
+            </p:cNvPr>
+            <p:cNvSpPr/>
+            <p:nvPr/>
+          </p:nvSpPr>
+          <p:spPr>
+            <a:xfrm>
+              <a:off x="9721312" y="1295952"/>
+              <a:ext cx="1440100" cy="432030"/>
+            </a:xfrm>
+            <a:prstGeom prst="rect">
+              <a:avLst/>
+            </a:prstGeom>
+            <a:grpFill/>
+            <a:ln>
+              <a:noFill/>
+            </a:ln>
+          </p:spPr>
+          <p:style>
+            <a:lnRef idx="2">
+              <a:schemeClr val="accent1">
+                <a:shade val="15000"/>
+              </a:schemeClr>
+            </a:lnRef>
+            <a:fillRef idx="1">
+              <a:schemeClr val="accent1"/>
+            </a:fillRef>
+            <a:effectRef idx="0">
+              <a:schemeClr val="accent1"/>
+            </a:effectRef>
+            <a:fontRef idx="minor">
+              <a:schemeClr val="lt1"/>
+            </a:fontRef>
+          </p:style>
+          <p:txBody>
+            <a:bodyPr rtlCol="0" anchor="ctr"/>
+            <a:lstStyle/>
+            <a:p>
+              <a:pPr algn="ctr"/>
+              <a:endParaRPr lang="zh-CN" altLang="en-US"/>
+            </a:p>
+          </p:txBody>
+        </p:sp>
+        <p:pic>
+          <p:nvPicPr>
+            <p:cNvPr id="28" name="图片 27">
+              <a:extLst>
+                <a:ext uri="{FF2B5EF4-FFF2-40B4-BE49-F238E27FC236}">
+                  <a16:creationId xmlns:a16="http://schemas.microsoft.com/office/drawing/2014/main" id="{0F2021B8-B7C3-890F-7AFE-A9194274FA91}"/>
+                </a:ext>
+              </a:extLst>
+            </p:cNvPr>
+            <p:cNvPicPr>
+              <a:picLocks noChangeAspect="1"/>
+            </p:cNvPicPr>
+            <p:nvPr/>
+          </p:nvPicPr>
+          <p:blipFill>
+            <a:blip r:embed="rId4">
+              <a:extLst>
+                <a:ext uri="{28A0092B-C50C-407E-A947-70E740481C1C}">
+                  <a14:useLocalDpi xmlns:a14="http://schemas.microsoft.com/office/drawing/2010/main" val="0"/>
+                </a:ext>
+              </a:extLst>
+            </a:blip>
+            <a:stretch>
+              <a:fillRect/>
+            </a:stretch>
+          </p:blipFill>
+          <p:spPr>
+            <a:xfrm>
+              <a:off x="9577302" y="1165376"/>
+              <a:ext cx="1695878" cy="706616"/>
+            </a:xfrm>
+            <a:prstGeom prst="rect">
+              <a:avLst/>
+            </a:prstGeom>
+            <a:grpFill/>
+          </p:spPr>
+        </p:pic>
+      </p:grpSp>
     </p:spTree>
   </p:cSld>
   <p:clrMapOvr>
@@ -9470,6 +10024,117 @@
           </a:p>
         </p:txBody>
       </p:sp>
+      <p:grpSp>
+        <p:nvGrpSpPr>
+          <p:cNvPr id="2" name="组合 1">
+            <a:extLst>
+              <a:ext uri="{FF2B5EF4-FFF2-40B4-BE49-F238E27FC236}">
+                <a16:creationId xmlns:a16="http://schemas.microsoft.com/office/drawing/2014/main" id="{F86704DF-48EB-95CA-A351-7D3927BF734B}"/>
+              </a:ext>
+            </a:extLst>
+          </p:cNvPr>
+          <p:cNvGrpSpPr/>
+          <p:nvPr/>
+        </p:nvGrpSpPr>
+        <p:grpSpPr>
+          <a:xfrm>
+            <a:off x="9577302" y="215877"/>
+            <a:ext cx="1695878" cy="706616"/>
+            <a:chOff x="9577302" y="1165376"/>
+            <a:chExt cx="1695878" cy="706616"/>
+          </a:xfrm>
+          <a:solidFill>
+            <a:schemeClr val="bg1"/>
+          </a:solidFill>
+        </p:grpSpPr>
+        <p:sp>
+          <p:nvSpPr>
+            <p:cNvPr id="3" name="矩形 2">
+              <a:extLst>
+                <a:ext uri="{FF2B5EF4-FFF2-40B4-BE49-F238E27FC236}">
+                  <a16:creationId xmlns:a16="http://schemas.microsoft.com/office/drawing/2014/main" id="{DD9C978C-5CEE-843E-F789-C433D60916D4}"/>
+                </a:ext>
+              </a:extLst>
+            </p:cNvPr>
+            <p:cNvSpPr/>
+            <p:nvPr/>
+          </p:nvSpPr>
+          <p:spPr>
+            <a:xfrm>
+              <a:off x="9721312" y="1295952"/>
+              <a:ext cx="1440100" cy="432030"/>
+            </a:xfrm>
+            <a:prstGeom prst="rect">
+              <a:avLst/>
+            </a:prstGeom>
+            <a:grpFill/>
+            <a:ln>
+              <a:noFill/>
+            </a:ln>
+          </p:spPr>
+          <p:style>
+            <a:lnRef idx="2">
+              <a:schemeClr val="accent1">
+                <a:shade val="15000"/>
+              </a:schemeClr>
+            </a:lnRef>
+            <a:fillRef idx="1">
+              <a:schemeClr val="accent1"/>
+            </a:fillRef>
+            <a:effectRef idx="0">
+              <a:schemeClr val="accent1"/>
+            </a:effectRef>
+            <a:fontRef idx="minor">
+              <a:schemeClr val="lt1"/>
+            </a:fontRef>
+          </p:style>
+          <p:txBody>
+            <a:bodyPr rtlCol="0" anchor="ctr"/>
+            <a:lstStyle/>
+            <a:p>
+              <a:pPr algn="ctr"/>
+              <a:endParaRPr lang="zh-CN" altLang="en-US"/>
+            </a:p>
+          </p:txBody>
+        </p:sp>
+        <p:pic>
+          <p:nvPicPr>
+            <p:cNvPr id="34" name="图片 33">
+              <a:extLst>
+                <a:ext uri="{FF2B5EF4-FFF2-40B4-BE49-F238E27FC236}">
+                  <a16:creationId xmlns:a16="http://schemas.microsoft.com/office/drawing/2014/main" id="{FB705FB2-7BA2-0A25-CAD2-A059FA4EB0C2}"/>
+                </a:ext>
+              </a:extLst>
+            </p:cNvPr>
+            <p:cNvPicPr>
+              <a:picLocks noChangeAspect="1"/>
+            </p:cNvPicPr>
+            <p:nvPr/>
+          </p:nvPicPr>
+          <p:blipFill>
+            <a:blip r:embed="rId4">
+              <a:extLst>
+                <a:ext uri="{28A0092B-C50C-407E-A947-70E740481C1C}">
+                  <a14:useLocalDpi xmlns:a14="http://schemas.microsoft.com/office/drawing/2010/main" val="0"/>
+                </a:ext>
+              </a:extLst>
+            </a:blip>
+            <a:stretch>
+              <a:fillRect/>
+            </a:stretch>
+          </p:blipFill>
+          <p:spPr>
+            <a:xfrm>
+              <a:off x="9577302" y="1165376"/>
+              <a:ext cx="1695878" cy="706616"/>
+            </a:xfrm>
+            <a:prstGeom prst="rect">
+              <a:avLst/>
+            </a:prstGeom>
+            <a:grpFill/>
+          </p:spPr>
+        </p:pic>
+      </p:grpSp>
     </p:spTree>
   </p:cSld>
   <p:clrMapOvr>
@@ -10863,6 +11528,117 @@
           </a:p>
         </p:txBody>
       </p:sp>
+      <p:grpSp>
+        <p:nvGrpSpPr>
+          <p:cNvPr id="2" name="组合 1">
+            <a:extLst>
+              <a:ext uri="{FF2B5EF4-FFF2-40B4-BE49-F238E27FC236}">
+                <a16:creationId xmlns:a16="http://schemas.microsoft.com/office/drawing/2014/main" id="{55A94640-84D8-88AE-37A7-86935A94C2AD}"/>
+              </a:ext>
+            </a:extLst>
+          </p:cNvPr>
+          <p:cNvGrpSpPr/>
+          <p:nvPr/>
+        </p:nvGrpSpPr>
+        <p:grpSpPr>
+          <a:xfrm>
+            <a:off x="9577302" y="215877"/>
+            <a:ext cx="1695878" cy="706616"/>
+            <a:chOff x="9577302" y="1165376"/>
+            <a:chExt cx="1695878" cy="706616"/>
+          </a:xfrm>
+          <a:solidFill>
+            <a:schemeClr val="bg1"/>
+          </a:solidFill>
+        </p:grpSpPr>
+        <p:sp>
+          <p:nvSpPr>
+            <p:cNvPr id="3" name="矩形 2">
+              <a:extLst>
+                <a:ext uri="{FF2B5EF4-FFF2-40B4-BE49-F238E27FC236}">
+                  <a16:creationId xmlns:a16="http://schemas.microsoft.com/office/drawing/2014/main" id="{5BF35048-4E3A-591D-30F7-9A5BD682BEC9}"/>
+                </a:ext>
+              </a:extLst>
+            </p:cNvPr>
+            <p:cNvSpPr/>
+            <p:nvPr/>
+          </p:nvSpPr>
+          <p:spPr>
+            <a:xfrm>
+              <a:off x="9721312" y="1295952"/>
+              <a:ext cx="1440100" cy="432030"/>
+            </a:xfrm>
+            <a:prstGeom prst="rect">
+              <a:avLst/>
+            </a:prstGeom>
+            <a:grpFill/>
+            <a:ln>
+              <a:noFill/>
+            </a:ln>
+          </p:spPr>
+          <p:style>
+            <a:lnRef idx="2">
+              <a:schemeClr val="accent1">
+                <a:shade val="15000"/>
+              </a:schemeClr>
+            </a:lnRef>
+            <a:fillRef idx="1">
+              <a:schemeClr val="accent1"/>
+            </a:fillRef>
+            <a:effectRef idx="0">
+              <a:schemeClr val="accent1"/>
+            </a:effectRef>
+            <a:fontRef idx="minor">
+              <a:schemeClr val="lt1"/>
+            </a:fontRef>
+          </p:style>
+          <p:txBody>
+            <a:bodyPr rtlCol="0" anchor="ctr"/>
+            <a:lstStyle/>
+            <a:p>
+              <a:pPr algn="ctr"/>
+              <a:endParaRPr lang="zh-CN" altLang="en-US"/>
+            </a:p>
+          </p:txBody>
+        </p:sp>
+        <p:pic>
+          <p:nvPicPr>
+            <p:cNvPr id="38" name="图片 37">
+              <a:extLst>
+                <a:ext uri="{FF2B5EF4-FFF2-40B4-BE49-F238E27FC236}">
+                  <a16:creationId xmlns:a16="http://schemas.microsoft.com/office/drawing/2014/main" id="{B26ADAC5-E527-D960-5033-7FE596B8FFC7}"/>
+                </a:ext>
+              </a:extLst>
+            </p:cNvPr>
+            <p:cNvPicPr>
+              <a:picLocks noChangeAspect="1"/>
+            </p:cNvPicPr>
+            <p:nvPr/>
+          </p:nvPicPr>
+          <p:blipFill>
+            <a:blip r:embed="rId4">
+              <a:extLst>
+                <a:ext uri="{28A0092B-C50C-407E-A947-70E740481C1C}">
+                  <a14:useLocalDpi xmlns:a14="http://schemas.microsoft.com/office/drawing/2010/main" val="0"/>
+                </a:ext>
+              </a:extLst>
+            </a:blip>
+            <a:stretch>
+              <a:fillRect/>
+            </a:stretch>
+          </p:blipFill>
+          <p:spPr>
+            <a:xfrm>
+              <a:off x="9577302" y="1165376"/>
+              <a:ext cx="1695878" cy="706616"/>
+            </a:xfrm>
+            <a:prstGeom prst="rect">
+              <a:avLst/>
+            </a:prstGeom>
+            <a:grpFill/>
+          </p:spPr>
+        </p:pic>
+      </p:grpSp>
     </p:spTree>
   </p:cSld>
   <p:clrMapOvr>
@@ -11187,460 +11963,117 @@
           </a:p>
         </p:txBody>
       </p:sp>
-    </p:spTree>
-  </p:cSld>
-  <p:clrMapOvr>
-    <a:masterClrMapping/>
-  </p:clrMapOvr>
-  <p:transition spd="med"/>
-</p:sld>
-</file>
-
-<file path=ppt/slides/slide17.xml><?xml version="1.0" encoding="utf-8"?>
-<p:sld xmlns:a="http://schemas.openxmlformats.org/drawingml/2006/main" xmlns:r="http://schemas.openxmlformats.org/officeDocument/2006/relationships" xmlns:p="http://schemas.openxmlformats.org/presentationml/2006/main">
-  <p:cSld>
-    <p:spTree>
-      <p:nvGrpSpPr>
-        <p:cNvPr id="1" name=""/>
-        <p:cNvGrpSpPr/>
-        <p:nvPr/>
-      </p:nvGrpSpPr>
-      <p:grpSpPr>
-        <a:xfrm>
-          <a:off x="0" y="0"/>
-          <a:ext cx="0" cy="0"/>
-          <a:chOff x="0" y="0"/>
-          <a:chExt cx="0" cy="0"/>
-        </a:xfrm>
-      </p:grpSpPr>
-      <p:sp>
-        <p:nvSpPr>
-          <p:cNvPr id="2" name="Rectangle 1"/>
-          <p:cNvSpPr/>
-          <p:nvPr/>
-        </p:nvSpPr>
-        <p:spPr>
-          <a:xfrm>
-            <a:off x="882" y="-1"/>
-            <a:ext cx="15360031" cy="207366"/>
-          </a:xfrm>
-          <a:prstGeom prst="rect">
-            <a:avLst/>
-          </a:prstGeom>
-          <a:solidFill>
-            <a:srgbClr val="1565C0"/>
-          </a:solidFill>
-          <a:ln>
-            <a:noFill/>
-          </a:ln>
-        </p:spPr>
-        <p:style>
-          <a:lnRef idx="1">
-            <a:schemeClr val="accent1"/>
-          </a:lnRef>
-          <a:fillRef idx="3">
-            <a:schemeClr val="accent1"/>
-          </a:fillRef>
-          <a:effectRef idx="2">
-            <a:schemeClr val="accent1"/>
-          </a:effectRef>
-          <a:fontRef idx="minor">
-            <a:schemeClr val="lt1"/>
-          </a:fontRef>
-        </p:style>
-        <p:txBody>
-          <a:bodyPr rtlCol="0" anchor="ctr"/>
-          <a:lstStyle/>
-          <a:p>
-            <a:pPr algn="ctr"/>
-            <a:endParaRPr sz="2142"/>
-          </a:p>
-        </p:txBody>
-      </p:sp>
-      <p:sp>
-        <p:nvSpPr>
-          <p:cNvPr id="3" name="TextBox 2"/>
-          <p:cNvSpPr txBox="1"/>
-          <p:nvPr/>
-        </p:nvSpPr>
-        <p:spPr>
-          <a:xfrm>
-            <a:off x="634499" y="403211"/>
-            <a:ext cx="1976823" cy="325025"/>
-          </a:xfrm>
-          <a:prstGeom prst="rect">
-            <a:avLst/>
-          </a:prstGeom>
-          <a:noFill/>
-        </p:spPr>
-        <p:txBody>
-          <a:bodyPr wrap="none">
-            <a:spAutoFit/>
-          </a:bodyPr>
-          <a:lstStyle/>
-          <a:p>
-            <a:r>
-              <a:rPr sz="1512" b="1">
-                <a:solidFill>
-                  <a:srgbClr val="1A3A6B"/>
-                </a:solidFill>
-                <a:latin typeface="Microsoft YaHei"/>
-              </a:rPr>
-              <a:t>中驰智能PPT Demo</a:t>
-            </a:r>
-          </a:p>
-        </p:txBody>
-      </p:sp>
-      <p:sp>
-        <p:nvSpPr>
-          <p:cNvPr id="4" name="TextBox 3"/>
-          <p:cNvSpPr txBox="1"/>
-          <p:nvPr/>
-        </p:nvSpPr>
-        <p:spPr>
-          <a:xfrm>
-            <a:off x="11982887" y="403211"/>
-            <a:ext cx="2085827" cy="305596"/>
-          </a:xfrm>
-          <a:prstGeom prst="rect">
-            <a:avLst/>
-          </a:prstGeom>
-          <a:noFill/>
-        </p:spPr>
-        <p:txBody>
-          <a:bodyPr wrap="none">
-            <a:spAutoFit/>
-          </a:bodyPr>
-          <a:lstStyle/>
-          <a:p>
-            <a:r>
-              <a:rPr sz="1386" b="1">
-                <a:solidFill>
-                  <a:srgbClr val="CA8A04"/>
-                </a:solidFill>
-                <a:latin typeface="Microsoft YaHei"/>
-              </a:rPr>
-              <a:t>M1/M2 | 项目生成信息</a:t>
-            </a:r>
-          </a:p>
-        </p:txBody>
-      </p:sp>
-      <p:sp>
-        <p:nvSpPr>
-          <p:cNvPr id="5" name="TextBox 4"/>
-          <p:cNvSpPr txBox="1"/>
-          <p:nvPr/>
-        </p:nvSpPr>
-        <p:spPr>
-          <a:xfrm>
-            <a:off x="807304" y="806422"/>
-            <a:ext cx="2714205" cy="596445"/>
-          </a:xfrm>
-          <a:prstGeom prst="rect">
-            <a:avLst/>
-          </a:prstGeom>
-          <a:noFill/>
-        </p:spPr>
-        <p:txBody>
-          <a:bodyPr wrap="none">
-            <a:spAutoFit/>
-          </a:bodyPr>
-          <a:lstStyle/>
-          <a:p>
-            <a:r>
-              <a:rPr sz="3276" b="1">
-                <a:solidFill>
-                  <a:srgbClr val="1A3A6B"/>
-                </a:solidFill>
-                <a:latin typeface="Microsoft YaHei"/>
-              </a:rPr>
-              <a:t>项目生成信息</a:t>
-            </a:r>
-          </a:p>
-        </p:txBody>
-      </p:sp>
-      <p:sp>
-        <p:nvSpPr>
-          <p:cNvPr id="6" name="Rectangle 5"/>
-          <p:cNvSpPr/>
-          <p:nvPr/>
-        </p:nvSpPr>
-        <p:spPr>
-          <a:xfrm>
-            <a:off x="807303" y="1555241"/>
-            <a:ext cx="2304062" cy="69122"/>
-          </a:xfrm>
-          <a:prstGeom prst="rect">
-            <a:avLst/>
-          </a:prstGeom>
-          <a:solidFill>
-            <a:srgbClr val="1565C0"/>
-          </a:solidFill>
-          <a:ln>
-            <a:noFill/>
-          </a:ln>
-        </p:spPr>
-        <p:style>
-          <a:lnRef idx="1">
-            <a:schemeClr val="accent1"/>
-          </a:lnRef>
-          <a:fillRef idx="3">
-            <a:schemeClr val="accent1"/>
-          </a:fillRef>
-          <a:effectRef idx="2">
-            <a:schemeClr val="accent1"/>
-          </a:effectRef>
-          <a:fontRef idx="minor">
-            <a:schemeClr val="lt1"/>
-          </a:fontRef>
-        </p:style>
-        <p:txBody>
-          <a:bodyPr rtlCol="0" anchor="ctr"/>
-          <a:lstStyle/>
-          <a:p>
-            <a:pPr algn="ctr"/>
-            <a:endParaRPr sz="2142"/>
-          </a:p>
-        </p:txBody>
-      </p:sp>
-      <p:sp>
-        <p:nvSpPr>
-          <p:cNvPr id="7" name="TextBox 6"/>
-          <p:cNvSpPr txBox="1"/>
-          <p:nvPr/>
-        </p:nvSpPr>
-        <p:spPr>
-          <a:xfrm>
-            <a:off x="1037710" y="1900851"/>
-            <a:ext cx="3496022" cy="402546"/>
-          </a:xfrm>
-          <a:prstGeom prst="rect">
-            <a:avLst/>
-          </a:prstGeom>
-          <a:noFill/>
-        </p:spPr>
-        <p:txBody>
-          <a:bodyPr wrap="none">
-            <a:spAutoFit/>
-          </a:bodyPr>
-          <a:lstStyle/>
-          <a:p>
-            <a:r>
-              <a:rPr sz="2016">
-                <a:solidFill>
-                  <a:srgbClr val="1F2937"/>
-                </a:solidFill>
-                <a:latin typeface="Microsoft YaHei"/>
-              </a:rPr>
-              <a:t>项目名称：{{project_name}}</a:t>
-            </a:r>
-          </a:p>
-        </p:txBody>
-      </p:sp>
-      <p:sp>
-        <p:nvSpPr>
-          <p:cNvPr id="8" name="TextBox 7"/>
-          <p:cNvSpPr txBox="1"/>
-          <p:nvPr/>
-        </p:nvSpPr>
-        <p:spPr>
-          <a:xfrm>
-            <a:off x="1037710" y="2534468"/>
-            <a:ext cx="4058675" cy="402546"/>
-          </a:xfrm>
-          <a:prstGeom prst="rect">
-            <a:avLst/>
-          </a:prstGeom>
-          <a:noFill/>
-        </p:spPr>
-        <p:txBody>
-          <a:bodyPr wrap="none">
-            <a:spAutoFit/>
-          </a:bodyPr>
-          <a:lstStyle/>
-          <a:p>
-            <a:r>
-              <a:rPr sz="2016">
-                <a:solidFill>
-                  <a:srgbClr val="1F2937"/>
-                </a:solidFill>
-                <a:latin typeface="Microsoft YaHei"/>
-              </a:rPr>
-              <a:t>项目所在地：{{project_location}}</a:t>
-            </a:r>
-          </a:p>
-        </p:txBody>
-      </p:sp>
-      <p:sp>
-        <p:nvSpPr>
-          <p:cNvPr id="9" name="TextBox 8"/>
-          <p:cNvSpPr txBox="1"/>
-          <p:nvPr/>
-        </p:nvSpPr>
-        <p:spPr>
-          <a:xfrm>
-            <a:off x="1037710" y="3168085"/>
-            <a:ext cx="3820277" cy="402546"/>
-          </a:xfrm>
-          <a:prstGeom prst="rect">
-            <a:avLst/>
-          </a:prstGeom>
-          <a:noFill/>
-        </p:spPr>
-        <p:txBody>
-          <a:bodyPr wrap="none">
-            <a:spAutoFit/>
-          </a:bodyPr>
-          <a:lstStyle/>
-          <a:p>
-            <a:r>
-              <a:rPr sz="2016">
-                <a:solidFill>
-                  <a:srgbClr val="1F2937"/>
-                </a:solidFill>
-                <a:latin typeface="Microsoft YaHei"/>
-              </a:rPr>
-              <a:t>建设/业主单位：{{owner_unit}}</a:t>
-            </a:r>
-          </a:p>
-        </p:txBody>
-      </p:sp>
-      <p:sp>
-        <p:nvSpPr>
-          <p:cNvPr id="10" name="TextBox 9"/>
-          <p:cNvSpPr txBox="1"/>
-          <p:nvPr/>
-        </p:nvSpPr>
-        <p:spPr>
-          <a:xfrm>
-            <a:off x="1037710" y="3801702"/>
-            <a:ext cx="3098477" cy="402546"/>
-          </a:xfrm>
-          <a:prstGeom prst="rect">
-            <a:avLst/>
-          </a:prstGeom>
-          <a:noFill/>
-        </p:spPr>
-        <p:txBody>
-          <a:bodyPr wrap="none">
-            <a:spAutoFit/>
-          </a:bodyPr>
-          <a:lstStyle/>
-          <a:p>
-            <a:r>
-              <a:rPr sz="2016">
-                <a:solidFill>
-                  <a:srgbClr val="1F2937"/>
-                </a:solidFill>
-                <a:latin typeface="Microsoft YaHei"/>
-              </a:rPr>
-              <a:t>产品线：{{product_line}}</a:t>
-            </a:r>
-          </a:p>
-        </p:txBody>
-      </p:sp>
-      <p:sp>
-        <p:nvSpPr>
-          <p:cNvPr id="11" name="TextBox 10"/>
-          <p:cNvSpPr txBox="1"/>
-          <p:nvPr/>
-        </p:nvSpPr>
-        <p:spPr>
-          <a:xfrm>
-            <a:off x="1037710" y="4435319"/>
-            <a:ext cx="3071675" cy="402546"/>
-          </a:xfrm>
-          <a:prstGeom prst="rect">
-            <a:avLst/>
-          </a:prstGeom>
-          <a:noFill/>
-        </p:spPr>
-        <p:txBody>
-          <a:bodyPr wrap="none">
-            <a:spAutoFit/>
-          </a:bodyPr>
-          <a:lstStyle/>
-          <a:p>
-            <a:r>
-              <a:rPr sz="2016">
-                <a:solidFill>
-                  <a:srgbClr val="1F2937"/>
-                </a:solidFill>
-                <a:latin typeface="Microsoft YaHei"/>
-              </a:rPr>
-              <a:t>线路名称：{{line_name}}</a:t>
-            </a:r>
-          </a:p>
-        </p:txBody>
-      </p:sp>
-      <p:sp>
-        <p:nvSpPr>
-          <p:cNvPr id="12" name="TextBox 11"/>
-          <p:cNvSpPr txBox="1"/>
-          <p:nvPr/>
-        </p:nvSpPr>
-        <p:spPr>
-          <a:xfrm>
-            <a:off x="1037710" y="5068937"/>
-            <a:ext cx="3788858" cy="402546"/>
-          </a:xfrm>
-          <a:prstGeom prst="rect">
-            <a:avLst/>
-          </a:prstGeom>
-          <a:noFill/>
-        </p:spPr>
-        <p:txBody>
-          <a:bodyPr wrap="none">
-            <a:spAutoFit/>
-          </a:bodyPr>
-          <a:lstStyle/>
-          <a:p>
-            <a:r>
-              <a:rPr sz="2016">
-                <a:solidFill>
-                  <a:srgbClr val="1F2937"/>
-                </a:solidFill>
-                <a:latin typeface="Microsoft YaHei"/>
-              </a:rPr>
-              <a:t>现场痛点：{{site_pain_points}}</a:t>
-            </a:r>
-          </a:p>
-        </p:txBody>
-      </p:sp>
-      <p:sp>
-        <p:nvSpPr>
-          <p:cNvPr id="13" name="TextBox 12"/>
-          <p:cNvSpPr txBox="1"/>
-          <p:nvPr/>
-        </p:nvSpPr>
-        <p:spPr>
-          <a:xfrm>
-            <a:off x="1037710" y="5702554"/>
-            <a:ext cx="4515980" cy="402546"/>
-          </a:xfrm>
-          <a:prstGeom prst="rect">
-            <a:avLst/>
-          </a:prstGeom>
-          <a:noFill/>
-        </p:spPr>
-        <p:txBody>
-          <a:bodyPr wrap="none">
-            <a:spAutoFit/>
-          </a:bodyPr>
-          <a:lstStyle/>
-          <a:p>
-            <a:r>
-              <a:rPr sz="2016">
-                <a:solidFill>
-                  <a:srgbClr val="1F2937"/>
-                </a:solidFill>
-                <a:latin typeface="Microsoft YaHei"/>
-              </a:rPr>
-              <a:t>施工场景：{{construction_scenario}}</a:t>
-            </a:r>
-          </a:p>
-        </p:txBody>
-      </p:sp>
+      <p:grpSp>
+        <p:nvGrpSpPr>
+          <p:cNvPr id="2" name="组合 1">
+            <a:extLst>
+              <a:ext uri="{FF2B5EF4-FFF2-40B4-BE49-F238E27FC236}">
+                <a16:creationId xmlns:a16="http://schemas.microsoft.com/office/drawing/2014/main" id="{97B7A0B7-5F7D-BD33-0C0E-769700CB01E0}"/>
+              </a:ext>
+            </a:extLst>
+          </p:cNvPr>
+          <p:cNvGrpSpPr/>
+          <p:nvPr/>
+        </p:nvGrpSpPr>
+        <p:grpSpPr>
+          <a:xfrm>
+            <a:off x="9577302" y="215877"/>
+            <a:ext cx="1695878" cy="706616"/>
+            <a:chOff x="9577302" y="1165376"/>
+            <a:chExt cx="1695878" cy="706616"/>
+          </a:xfrm>
+          <a:solidFill>
+            <a:schemeClr val="bg1"/>
+          </a:solidFill>
+        </p:grpSpPr>
+        <p:sp>
+          <p:nvSpPr>
+            <p:cNvPr id="3" name="矩形 2">
+              <a:extLst>
+                <a:ext uri="{FF2B5EF4-FFF2-40B4-BE49-F238E27FC236}">
+                  <a16:creationId xmlns:a16="http://schemas.microsoft.com/office/drawing/2014/main" id="{980F77E9-3ACE-8935-5CA7-886AD4DE28DF}"/>
+                </a:ext>
+              </a:extLst>
+            </p:cNvPr>
+            <p:cNvSpPr/>
+            <p:nvPr/>
+          </p:nvSpPr>
+          <p:spPr>
+            <a:xfrm>
+              <a:off x="9721312" y="1295952"/>
+              <a:ext cx="1440100" cy="432030"/>
+            </a:xfrm>
+            <a:prstGeom prst="rect">
+              <a:avLst/>
+            </a:prstGeom>
+            <a:grpFill/>
+            <a:ln>
+              <a:noFill/>
+            </a:ln>
+          </p:spPr>
+          <p:style>
+            <a:lnRef idx="2">
+              <a:schemeClr val="accent1">
+                <a:shade val="15000"/>
+              </a:schemeClr>
+            </a:lnRef>
+            <a:fillRef idx="1">
+              <a:schemeClr val="accent1"/>
+            </a:fillRef>
+            <a:effectRef idx="0">
+              <a:schemeClr val="accent1"/>
+            </a:effectRef>
+            <a:fontRef idx="minor">
+              <a:schemeClr val="lt1"/>
+            </a:fontRef>
+          </p:style>
+          <p:txBody>
+            <a:bodyPr rtlCol="0" anchor="ctr"/>
+            <a:lstStyle/>
+            <a:p>
+              <a:pPr algn="ctr"/>
+              <a:endParaRPr lang="zh-CN" altLang="en-US"/>
+            </a:p>
+          </p:txBody>
+        </p:sp>
+        <p:pic>
+          <p:nvPicPr>
+            <p:cNvPr id="9" name="图片 8">
+              <a:extLst>
+                <a:ext uri="{FF2B5EF4-FFF2-40B4-BE49-F238E27FC236}">
+                  <a16:creationId xmlns:a16="http://schemas.microsoft.com/office/drawing/2014/main" id="{E8BA0E57-7FC7-038D-475C-A94DE56DE4DA}"/>
+                </a:ext>
+              </a:extLst>
+            </p:cNvPr>
+            <p:cNvPicPr>
+              <a:picLocks noChangeAspect="1"/>
+            </p:cNvPicPr>
+            <p:nvPr/>
+          </p:nvPicPr>
+          <p:blipFill>
+            <a:blip r:embed="rId4">
+              <a:extLst>
+                <a:ext uri="{28A0092B-C50C-407E-A947-70E740481C1C}">
+                  <a14:useLocalDpi xmlns:a14="http://schemas.microsoft.com/office/drawing/2010/main" val="0"/>
+                </a:ext>
+              </a:extLst>
+            </a:blip>
+            <a:stretch>
+              <a:fillRect/>
+            </a:stretch>
+          </p:blipFill>
+          <p:spPr>
+            <a:xfrm>
+              <a:off x="9577302" y="1165376"/>
+              <a:ext cx="1695878" cy="706616"/>
+            </a:xfrm>
+            <a:prstGeom prst="rect">
+              <a:avLst/>
+            </a:prstGeom>
+            <a:grpFill/>
+          </p:spPr>
+        </p:pic>
+      </p:grpSp>
     </p:spTree>
   </p:cSld>
   <p:clrMapOvr>
@@ -13652,6 +14085,117 @@
           </a:p>
         </p:txBody>
       </p:sp>
+      <p:grpSp>
+        <p:nvGrpSpPr>
+          <p:cNvPr id="2" name="组合 1">
+            <a:extLst>
+              <a:ext uri="{FF2B5EF4-FFF2-40B4-BE49-F238E27FC236}">
+                <a16:creationId xmlns:a16="http://schemas.microsoft.com/office/drawing/2014/main" id="{1108CEFB-8563-C0DD-D41F-FEB94D5ECE44}"/>
+              </a:ext>
+            </a:extLst>
+          </p:cNvPr>
+          <p:cNvGrpSpPr/>
+          <p:nvPr/>
+        </p:nvGrpSpPr>
+        <p:grpSpPr>
+          <a:xfrm>
+            <a:off x="9577302" y="215877"/>
+            <a:ext cx="1695878" cy="706616"/>
+            <a:chOff x="9577302" y="1165376"/>
+            <a:chExt cx="1695878" cy="706616"/>
+          </a:xfrm>
+          <a:solidFill>
+            <a:schemeClr val="bg1"/>
+          </a:solidFill>
+        </p:grpSpPr>
+        <p:sp>
+          <p:nvSpPr>
+            <p:cNvPr id="3" name="矩形 2">
+              <a:extLst>
+                <a:ext uri="{FF2B5EF4-FFF2-40B4-BE49-F238E27FC236}">
+                  <a16:creationId xmlns:a16="http://schemas.microsoft.com/office/drawing/2014/main" id="{BC80C71A-C4AD-AEF1-F4F0-03A5F7ECCF65}"/>
+                </a:ext>
+              </a:extLst>
+            </p:cNvPr>
+            <p:cNvSpPr/>
+            <p:nvPr/>
+          </p:nvSpPr>
+          <p:spPr>
+            <a:xfrm>
+              <a:off x="9721312" y="1295952"/>
+              <a:ext cx="1440100" cy="432030"/>
+            </a:xfrm>
+            <a:prstGeom prst="rect">
+              <a:avLst/>
+            </a:prstGeom>
+            <a:grpFill/>
+            <a:ln>
+              <a:noFill/>
+            </a:ln>
+          </p:spPr>
+          <p:style>
+            <a:lnRef idx="2">
+              <a:schemeClr val="accent1">
+                <a:shade val="15000"/>
+              </a:schemeClr>
+            </a:lnRef>
+            <a:fillRef idx="1">
+              <a:schemeClr val="accent1"/>
+            </a:fillRef>
+            <a:effectRef idx="0">
+              <a:schemeClr val="accent1"/>
+            </a:effectRef>
+            <a:fontRef idx="minor">
+              <a:schemeClr val="lt1"/>
+            </a:fontRef>
+          </p:style>
+          <p:txBody>
+            <a:bodyPr rtlCol="0" anchor="ctr"/>
+            <a:lstStyle/>
+            <a:p>
+              <a:pPr algn="ctr"/>
+              <a:endParaRPr lang="zh-CN" altLang="en-US"/>
+            </a:p>
+          </p:txBody>
+        </p:sp>
+        <p:pic>
+          <p:nvPicPr>
+            <p:cNvPr id="52" name="图片 51">
+              <a:extLst>
+                <a:ext uri="{FF2B5EF4-FFF2-40B4-BE49-F238E27FC236}">
+                  <a16:creationId xmlns:a16="http://schemas.microsoft.com/office/drawing/2014/main" id="{AD48C57E-0222-1ADF-882C-E9DCC2A4DED3}"/>
+                </a:ext>
+              </a:extLst>
+            </p:cNvPr>
+            <p:cNvPicPr>
+              <a:picLocks noChangeAspect="1"/>
+            </p:cNvPicPr>
+            <p:nvPr/>
+          </p:nvPicPr>
+          <p:blipFill>
+            <a:blip r:embed="rId4">
+              <a:extLst>
+                <a:ext uri="{28A0092B-C50C-407E-A947-70E740481C1C}">
+                  <a14:useLocalDpi xmlns:a14="http://schemas.microsoft.com/office/drawing/2010/main" val="0"/>
+                </a:ext>
+              </a:extLst>
+            </a:blip>
+            <a:stretch>
+              <a:fillRect/>
+            </a:stretch>
+          </p:blipFill>
+          <p:spPr>
+            <a:xfrm>
+              <a:off x="9577302" y="1165376"/>
+              <a:ext cx="1695878" cy="706616"/>
+            </a:xfrm>
+            <a:prstGeom prst="rect">
+              <a:avLst/>
+            </a:prstGeom>
+            <a:grpFill/>
+          </p:spPr>
+        </p:pic>
+      </p:grpSp>
     </p:spTree>
   </p:cSld>
   <p:clrMapOvr>
@@ -14096,6 +14640,117 @@
           </a:p>
         </p:txBody>
       </p:sp>
+      <p:grpSp>
+        <p:nvGrpSpPr>
+          <p:cNvPr id="2" name="组合 1">
+            <a:extLst>
+              <a:ext uri="{FF2B5EF4-FFF2-40B4-BE49-F238E27FC236}">
+                <a16:creationId xmlns:a16="http://schemas.microsoft.com/office/drawing/2014/main" id="{C1B4EF37-FD8A-4B92-9C71-031C4B35EECE}"/>
+              </a:ext>
+            </a:extLst>
+          </p:cNvPr>
+          <p:cNvGrpSpPr/>
+          <p:nvPr/>
+        </p:nvGrpSpPr>
+        <p:grpSpPr>
+          <a:xfrm>
+            <a:off x="9577302" y="215877"/>
+            <a:ext cx="1695878" cy="706616"/>
+            <a:chOff x="9577302" y="1165376"/>
+            <a:chExt cx="1695878" cy="706616"/>
+          </a:xfrm>
+          <a:solidFill>
+            <a:schemeClr val="bg1"/>
+          </a:solidFill>
+        </p:grpSpPr>
+        <p:sp>
+          <p:nvSpPr>
+            <p:cNvPr id="3" name="矩形 2">
+              <a:extLst>
+                <a:ext uri="{FF2B5EF4-FFF2-40B4-BE49-F238E27FC236}">
+                  <a16:creationId xmlns:a16="http://schemas.microsoft.com/office/drawing/2014/main" id="{65A03FD4-C66D-5885-1015-F8E41CB90F18}"/>
+                </a:ext>
+              </a:extLst>
+            </p:cNvPr>
+            <p:cNvSpPr/>
+            <p:nvPr/>
+          </p:nvSpPr>
+          <p:spPr>
+            <a:xfrm>
+              <a:off x="9721312" y="1295952"/>
+              <a:ext cx="1440100" cy="432030"/>
+            </a:xfrm>
+            <a:prstGeom prst="rect">
+              <a:avLst/>
+            </a:prstGeom>
+            <a:grpFill/>
+            <a:ln>
+              <a:noFill/>
+            </a:ln>
+          </p:spPr>
+          <p:style>
+            <a:lnRef idx="2">
+              <a:schemeClr val="accent1">
+                <a:shade val="15000"/>
+              </a:schemeClr>
+            </a:lnRef>
+            <a:fillRef idx="1">
+              <a:schemeClr val="accent1"/>
+            </a:fillRef>
+            <a:effectRef idx="0">
+              <a:schemeClr val="accent1"/>
+            </a:effectRef>
+            <a:fontRef idx="minor">
+              <a:schemeClr val="lt1"/>
+            </a:fontRef>
+          </p:style>
+          <p:txBody>
+            <a:bodyPr rtlCol="0" anchor="ctr"/>
+            <a:lstStyle/>
+            <a:p>
+              <a:pPr algn="ctr"/>
+              <a:endParaRPr lang="zh-CN" altLang="en-US"/>
+            </a:p>
+          </p:txBody>
+        </p:sp>
+        <p:pic>
+          <p:nvPicPr>
+            <p:cNvPr id="14" name="图片 13">
+              <a:extLst>
+                <a:ext uri="{FF2B5EF4-FFF2-40B4-BE49-F238E27FC236}">
+                  <a16:creationId xmlns:a16="http://schemas.microsoft.com/office/drawing/2014/main" id="{C01DCE9C-4437-B33E-EE54-0668CBEEECA5}"/>
+                </a:ext>
+              </a:extLst>
+            </p:cNvPr>
+            <p:cNvPicPr>
+              <a:picLocks noChangeAspect="1"/>
+            </p:cNvPicPr>
+            <p:nvPr/>
+          </p:nvPicPr>
+          <p:blipFill>
+            <a:blip r:embed="rId5">
+              <a:extLst>
+                <a:ext uri="{28A0092B-C50C-407E-A947-70E740481C1C}">
+                  <a14:useLocalDpi xmlns:a14="http://schemas.microsoft.com/office/drawing/2010/main" val="0"/>
+                </a:ext>
+              </a:extLst>
+            </a:blip>
+            <a:stretch>
+              <a:fillRect/>
+            </a:stretch>
+          </p:blipFill>
+          <p:spPr>
+            <a:xfrm>
+              <a:off x="9577302" y="1165376"/>
+              <a:ext cx="1695878" cy="706616"/>
+            </a:xfrm>
+            <a:prstGeom prst="rect">
+              <a:avLst/>
+            </a:prstGeom>
+            <a:grpFill/>
+          </p:spPr>
+        </p:pic>
+      </p:grpSp>
     </p:spTree>
   </p:cSld>
   <p:clrMapOvr>
@@ -16374,6 +17029,117 @@
           </a:p>
         </p:txBody>
       </p:sp>
+      <p:grpSp>
+        <p:nvGrpSpPr>
+          <p:cNvPr id="2" name="组合 1">
+            <a:extLst>
+              <a:ext uri="{FF2B5EF4-FFF2-40B4-BE49-F238E27FC236}">
+                <a16:creationId xmlns:a16="http://schemas.microsoft.com/office/drawing/2014/main" id="{7EE0E81E-1862-6238-08A5-9A72337A7364}"/>
+              </a:ext>
+            </a:extLst>
+          </p:cNvPr>
+          <p:cNvGrpSpPr/>
+          <p:nvPr/>
+        </p:nvGrpSpPr>
+        <p:grpSpPr>
+          <a:xfrm>
+            <a:off x="9577302" y="215877"/>
+            <a:ext cx="1695878" cy="706616"/>
+            <a:chOff x="9577302" y="1165376"/>
+            <a:chExt cx="1695878" cy="706616"/>
+          </a:xfrm>
+          <a:solidFill>
+            <a:schemeClr val="bg1"/>
+          </a:solidFill>
+        </p:grpSpPr>
+        <p:sp>
+          <p:nvSpPr>
+            <p:cNvPr id="3" name="矩形 2">
+              <a:extLst>
+                <a:ext uri="{FF2B5EF4-FFF2-40B4-BE49-F238E27FC236}">
+                  <a16:creationId xmlns:a16="http://schemas.microsoft.com/office/drawing/2014/main" id="{5A9AFB31-15E5-B299-7395-5AFE6DE7E498}"/>
+                </a:ext>
+              </a:extLst>
+            </p:cNvPr>
+            <p:cNvSpPr/>
+            <p:nvPr/>
+          </p:nvSpPr>
+          <p:spPr>
+            <a:xfrm>
+              <a:off x="9721312" y="1295952"/>
+              <a:ext cx="1440100" cy="432030"/>
+            </a:xfrm>
+            <a:prstGeom prst="rect">
+              <a:avLst/>
+            </a:prstGeom>
+            <a:grpFill/>
+            <a:ln>
+              <a:noFill/>
+            </a:ln>
+          </p:spPr>
+          <p:style>
+            <a:lnRef idx="2">
+              <a:schemeClr val="accent1">
+                <a:shade val="15000"/>
+              </a:schemeClr>
+            </a:lnRef>
+            <a:fillRef idx="1">
+              <a:schemeClr val="accent1"/>
+            </a:fillRef>
+            <a:effectRef idx="0">
+              <a:schemeClr val="accent1"/>
+            </a:effectRef>
+            <a:fontRef idx="minor">
+              <a:schemeClr val="lt1"/>
+            </a:fontRef>
+          </p:style>
+          <p:txBody>
+            <a:bodyPr rtlCol="0" anchor="ctr"/>
+            <a:lstStyle/>
+            <a:p>
+              <a:pPr algn="ctr"/>
+              <a:endParaRPr lang="zh-CN" altLang="en-US"/>
+            </a:p>
+          </p:txBody>
+        </p:sp>
+        <p:pic>
+          <p:nvPicPr>
+            <p:cNvPr id="73" name="图片 72">
+              <a:extLst>
+                <a:ext uri="{FF2B5EF4-FFF2-40B4-BE49-F238E27FC236}">
+                  <a16:creationId xmlns:a16="http://schemas.microsoft.com/office/drawing/2014/main" id="{8A7BD8B4-2591-79B8-CE6F-3C4D07FFE4C5}"/>
+                </a:ext>
+              </a:extLst>
+            </p:cNvPr>
+            <p:cNvPicPr>
+              <a:picLocks noChangeAspect="1"/>
+            </p:cNvPicPr>
+            <p:nvPr/>
+          </p:nvPicPr>
+          <p:blipFill>
+            <a:blip r:embed="rId4">
+              <a:extLst>
+                <a:ext uri="{28A0092B-C50C-407E-A947-70E740481C1C}">
+                  <a14:useLocalDpi xmlns:a14="http://schemas.microsoft.com/office/drawing/2010/main" val="0"/>
+                </a:ext>
+              </a:extLst>
+            </a:blip>
+            <a:stretch>
+              <a:fillRect/>
+            </a:stretch>
+          </p:blipFill>
+          <p:spPr>
+            <a:xfrm>
+              <a:off x="9577302" y="1165376"/>
+              <a:ext cx="1695878" cy="706616"/>
+            </a:xfrm>
+            <a:prstGeom prst="rect">
+              <a:avLst/>
+            </a:prstGeom>
+            <a:grpFill/>
+          </p:spPr>
+        </p:pic>
+      </p:grpSp>
     </p:spTree>
   </p:cSld>
   <p:clrMapOvr>
@@ -17329,6 +18095,117 @@
           </a:p>
         </p:txBody>
       </p:sp>
+      <p:grpSp>
+        <p:nvGrpSpPr>
+          <p:cNvPr id="2" name="组合 1">
+            <a:extLst>
+              <a:ext uri="{FF2B5EF4-FFF2-40B4-BE49-F238E27FC236}">
+                <a16:creationId xmlns:a16="http://schemas.microsoft.com/office/drawing/2014/main" id="{9661A024-598E-60E0-5D74-15725141B345}"/>
+              </a:ext>
+            </a:extLst>
+          </p:cNvPr>
+          <p:cNvGrpSpPr/>
+          <p:nvPr/>
+        </p:nvGrpSpPr>
+        <p:grpSpPr>
+          <a:xfrm>
+            <a:off x="9577302" y="215877"/>
+            <a:ext cx="1695878" cy="706616"/>
+            <a:chOff x="9577302" y="1165376"/>
+            <a:chExt cx="1695878" cy="706616"/>
+          </a:xfrm>
+          <a:solidFill>
+            <a:schemeClr val="bg1"/>
+          </a:solidFill>
+        </p:grpSpPr>
+        <p:sp>
+          <p:nvSpPr>
+            <p:cNvPr id="3" name="矩形 2">
+              <a:extLst>
+                <a:ext uri="{FF2B5EF4-FFF2-40B4-BE49-F238E27FC236}">
+                  <a16:creationId xmlns:a16="http://schemas.microsoft.com/office/drawing/2014/main" id="{7353FFAC-6497-E071-89D9-4727EA73E4DB}"/>
+                </a:ext>
+              </a:extLst>
+            </p:cNvPr>
+            <p:cNvSpPr/>
+            <p:nvPr/>
+          </p:nvSpPr>
+          <p:spPr>
+            <a:xfrm>
+              <a:off x="9721312" y="1295952"/>
+              <a:ext cx="1440100" cy="432030"/>
+            </a:xfrm>
+            <a:prstGeom prst="rect">
+              <a:avLst/>
+            </a:prstGeom>
+            <a:grpFill/>
+            <a:ln>
+              <a:noFill/>
+            </a:ln>
+          </p:spPr>
+          <p:style>
+            <a:lnRef idx="2">
+              <a:schemeClr val="accent1">
+                <a:shade val="15000"/>
+              </a:schemeClr>
+            </a:lnRef>
+            <a:fillRef idx="1">
+              <a:schemeClr val="accent1"/>
+            </a:fillRef>
+            <a:effectRef idx="0">
+              <a:schemeClr val="accent1"/>
+            </a:effectRef>
+            <a:fontRef idx="minor">
+              <a:schemeClr val="lt1"/>
+            </a:fontRef>
+          </p:style>
+          <p:txBody>
+            <a:bodyPr rtlCol="0" anchor="ctr"/>
+            <a:lstStyle/>
+            <a:p>
+              <a:pPr algn="ctr"/>
+              <a:endParaRPr lang="zh-CN" altLang="en-US"/>
+            </a:p>
+          </p:txBody>
+        </p:sp>
+        <p:pic>
+          <p:nvPicPr>
+            <p:cNvPr id="28" name="图片 27">
+              <a:extLst>
+                <a:ext uri="{FF2B5EF4-FFF2-40B4-BE49-F238E27FC236}">
+                  <a16:creationId xmlns:a16="http://schemas.microsoft.com/office/drawing/2014/main" id="{DE3CF82D-1F7F-4BF0-CB25-6F5138ACCF96}"/>
+                </a:ext>
+              </a:extLst>
+            </p:cNvPr>
+            <p:cNvPicPr>
+              <a:picLocks noChangeAspect="1"/>
+            </p:cNvPicPr>
+            <p:nvPr/>
+          </p:nvPicPr>
+          <p:blipFill>
+            <a:blip r:embed="rId4">
+              <a:extLst>
+                <a:ext uri="{28A0092B-C50C-407E-A947-70E740481C1C}">
+                  <a14:useLocalDpi xmlns:a14="http://schemas.microsoft.com/office/drawing/2010/main" val="0"/>
+                </a:ext>
+              </a:extLst>
+            </a:blip>
+            <a:stretch>
+              <a:fillRect/>
+            </a:stretch>
+          </p:blipFill>
+          <p:spPr>
+            <a:xfrm>
+              <a:off x="9577302" y="1165376"/>
+              <a:ext cx="1695878" cy="706616"/>
+            </a:xfrm>
+            <a:prstGeom prst="rect">
+              <a:avLst/>
+            </a:prstGeom>
+            <a:grpFill/>
+          </p:spPr>
+        </p:pic>
+      </p:grpSp>
     </p:spTree>
   </p:cSld>
   <p:clrMapOvr>
@@ -18531,6 +19408,117 @@
           </a:p>
         </p:txBody>
       </p:sp>
+      <p:grpSp>
+        <p:nvGrpSpPr>
+          <p:cNvPr id="2" name="组合 1">
+            <a:extLst>
+              <a:ext uri="{FF2B5EF4-FFF2-40B4-BE49-F238E27FC236}">
+                <a16:creationId xmlns:a16="http://schemas.microsoft.com/office/drawing/2014/main" id="{4C30875D-5CFA-FF51-7886-F67FF995F274}"/>
+              </a:ext>
+            </a:extLst>
+          </p:cNvPr>
+          <p:cNvGrpSpPr/>
+          <p:nvPr/>
+        </p:nvGrpSpPr>
+        <p:grpSpPr>
+          <a:xfrm>
+            <a:off x="9577302" y="215877"/>
+            <a:ext cx="1695878" cy="706616"/>
+            <a:chOff x="9577302" y="1165376"/>
+            <a:chExt cx="1695878" cy="706616"/>
+          </a:xfrm>
+          <a:solidFill>
+            <a:schemeClr val="bg1"/>
+          </a:solidFill>
+        </p:grpSpPr>
+        <p:sp>
+          <p:nvSpPr>
+            <p:cNvPr id="3" name="矩形 2">
+              <a:extLst>
+                <a:ext uri="{FF2B5EF4-FFF2-40B4-BE49-F238E27FC236}">
+                  <a16:creationId xmlns:a16="http://schemas.microsoft.com/office/drawing/2014/main" id="{156AAF31-7A3F-6DAE-EFD5-037F0E16EF9A}"/>
+                </a:ext>
+              </a:extLst>
+            </p:cNvPr>
+            <p:cNvSpPr/>
+            <p:nvPr/>
+          </p:nvSpPr>
+          <p:spPr>
+            <a:xfrm>
+              <a:off x="9721312" y="1295952"/>
+              <a:ext cx="1440100" cy="432030"/>
+            </a:xfrm>
+            <a:prstGeom prst="rect">
+              <a:avLst/>
+            </a:prstGeom>
+            <a:grpFill/>
+            <a:ln>
+              <a:noFill/>
+            </a:ln>
+          </p:spPr>
+          <p:style>
+            <a:lnRef idx="2">
+              <a:schemeClr val="accent1">
+                <a:shade val="15000"/>
+              </a:schemeClr>
+            </a:lnRef>
+            <a:fillRef idx="1">
+              <a:schemeClr val="accent1"/>
+            </a:fillRef>
+            <a:effectRef idx="0">
+              <a:schemeClr val="accent1"/>
+            </a:effectRef>
+            <a:fontRef idx="minor">
+              <a:schemeClr val="lt1"/>
+            </a:fontRef>
+          </p:style>
+          <p:txBody>
+            <a:bodyPr rtlCol="0" anchor="ctr"/>
+            <a:lstStyle/>
+            <a:p>
+              <a:pPr algn="ctr"/>
+              <a:endParaRPr lang="zh-CN" altLang="en-US"/>
+            </a:p>
+          </p:txBody>
+        </p:sp>
+        <p:pic>
+          <p:nvPicPr>
+            <p:cNvPr id="36" name="图片 35">
+              <a:extLst>
+                <a:ext uri="{FF2B5EF4-FFF2-40B4-BE49-F238E27FC236}">
+                  <a16:creationId xmlns:a16="http://schemas.microsoft.com/office/drawing/2014/main" id="{63525447-D0D9-813C-B2AC-5935A33D630A}"/>
+                </a:ext>
+              </a:extLst>
+            </p:cNvPr>
+            <p:cNvPicPr>
+              <a:picLocks noChangeAspect="1"/>
+            </p:cNvPicPr>
+            <p:nvPr/>
+          </p:nvPicPr>
+          <p:blipFill>
+            <a:blip r:embed="rId4">
+              <a:extLst>
+                <a:ext uri="{28A0092B-C50C-407E-A947-70E740481C1C}">
+                  <a14:useLocalDpi xmlns:a14="http://schemas.microsoft.com/office/drawing/2010/main" val="0"/>
+                </a:ext>
+              </a:extLst>
+            </a:blip>
+            <a:stretch>
+              <a:fillRect/>
+            </a:stretch>
+          </p:blipFill>
+          <p:spPr>
+            <a:xfrm>
+              <a:off x="9577302" y="1165376"/>
+              <a:ext cx="1695878" cy="706616"/>
+            </a:xfrm>
+            <a:prstGeom prst="rect">
+              <a:avLst/>
+            </a:prstGeom>
+            <a:grpFill/>
+          </p:spPr>
+        </p:pic>
+      </p:grpSp>
     </p:spTree>
   </p:cSld>
   <p:clrMapOvr>
@@ -19251,6 +20239,117 @@
           </a:p>
         </p:txBody>
       </p:sp>
+      <p:grpSp>
+        <p:nvGrpSpPr>
+          <p:cNvPr id="2" name="组合 1">
+            <a:extLst>
+              <a:ext uri="{FF2B5EF4-FFF2-40B4-BE49-F238E27FC236}">
+                <a16:creationId xmlns:a16="http://schemas.microsoft.com/office/drawing/2014/main" id="{49670F4E-90EC-C613-F116-885716ABAF29}"/>
+              </a:ext>
+            </a:extLst>
+          </p:cNvPr>
+          <p:cNvGrpSpPr/>
+          <p:nvPr/>
+        </p:nvGrpSpPr>
+        <p:grpSpPr>
+          <a:xfrm>
+            <a:off x="9577302" y="215877"/>
+            <a:ext cx="1695878" cy="706616"/>
+            <a:chOff x="9577302" y="1165376"/>
+            <a:chExt cx="1695878" cy="706616"/>
+          </a:xfrm>
+          <a:solidFill>
+            <a:schemeClr val="bg1"/>
+          </a:solidFill>
+        </p:grpSpPr>
+        <p:sp>
+          <p:nvSpPr>
+            <p:cNvPr id="3" name="矩形 2">
+              <a:extLst>
+                <a:ext uri="{FF2B5EF4-FFF2-40B4-BE49-F238E27FC236}">
+                  <a16:creationId xmlns:a16="http://schemas.microsoft.com/office/drawing/2014/main" id="{77468C10-E799-9A52-43C3-71F1F7F67B3E}"/>
+                </a:ext>
+              </a:extLst>
+            </p:cNvPr>
+            <p:cNvSpPr/>
+            <p:nvPr/>
+          </p:nvSpPr>
+          <p:spPr>
+            <a:xfrm>
+              <a:off x="9721312" y="1295952"/>
+              <a:ext cx="1440100" cy="432030"/>
+            </a:xfrm>
+            <a:prstGeom prst="rect">
+              <a:avLst/>
+            </a:prstGeom>
+            <a:grpFill/>
+            <a:ln>
+              <a:noFill/>
+            </a:ln>
+          </p:spPr>
+          <p:style>
+            <a:lnRef idx="2">
+              <a:schemeClr val="accent1">
+                <a:shade val="15000"/>
+              </a:schemeClr>
+            </a:lnRef>
+            <a:fillRef idx="1">
+              <a:schemeClr val="accent1"/>
+            </a:fillRef>
+            <a:effectRef idx="0">
+              <a:schemeClr val="accent1"/>
+            </a:effectRef>
+            <a:fontRef idx="minor">
+              <a:schemeClr val="lt1"/>
+            </a:fontRef>
+          </p:style>
+          <p:txBody>
+            <a:bodyPr rtlCol="0" anchor="ctr"/>
+            <a:lstStyle/>
+            <a:p>
+              <a:pPr algn="ctr"/>
+              <a:endParaRPr lang="zh-CN" altLang="en-US"/>
+            </a:p>
+          </p:txBody>
+        </p:sp>
+        <p:pic>
+          <p:nvPicPr>
+            <p:cNvPr id="20" name="图片 19">
+              <a:extLst>
+                <a:ext uri="{FF2B5EF4-FFF2-40B4-BE49-F238E27FC236}">
+                  <a16:creationId xmlns:a16="http://schemas.microsoft.com/office/drawing/2014/main" id="{A64F8044-BE8D-DBF2-97AA-7126ED4A78BA}"/>
+                </a:ext>
+              </a:extLst>
+            </p:cNvPr>
+            <p:cNvPicPr>
+              <a:picLocks noChangeAspect="1"/>
+            </p:cNvPicPr>
+            <p:nvPr/>
+          </p:nvPicPr>
+          <p:blipFill>
+            <a:blip r:embed="rId4">
+              <a:extLst>
+                <a:ext uri="{28A0092B-C50C-407E-A947-70E740481C1C}">
+                  <a14:useLocalDpi xmlns:a14="http://schemas.microsoft.com/office/drawing/2010/main" val="0"/>
+                </a:ext>
+              </a:extLst>
+            </a:blip>
+            <a:stretch>
+              <a:fillRect/>
+            </a:stretch>
+          </p:blipFill>
+          <p:spPr>
+            <a:xfrm>
+              <a:off x="9577302" y="1165376"/>
+              <a:ext cx="1695878" cy="706616"/>
+            </a:xfrm>
+            <a:prstGeom prst="rect">
+              <a:avLst/>
+            </a:prstGeom>
+            <a:grpFill/>
+          </p:spPr>
+        </p:pic>
+      </p:grpSp>
     </p:spTree>
   </p:cSld>
   <p:clrMapOvr>
@@ -19695,6 +20794,117 @@
           </a:p>
         </p:txBody>
       </p:sp>
+      <p:grpSp>
+        <p:nvGrpSpPr>
+          <p:cNvPr id="2" name="组合 1">
+            <a:extLst>
+              <a:ext uri="{FF2B5EF4-FFF2-40B4-BE49-F238E27FC236}">
+                <a16:creationId xmlns:a16="http://schemas.microsoft.com/office/drawing/2014/main" id="{8F5B748F-950F-5011-E1BC-3FB55E8618DA}"/>
+              </a:ext>
+            </a:extLst>
+          </p:cNvPr>
+          <p:cNvGrpSpPr/>
+          <p:nvPr/>
+        </p:nvGrpSpPr>
+        <p:grpSpPr>
+          <a:xfrm>
+            <a:off x="9577302" y="215877"/>
+            <a:ext cx="1695878" cy="706616"/>
+            <a:chOff x="9577302" y="1165376"/>
+            <a:chExt cx="1695878" cy="706616"/>
+          </a:xfrm>
+          <a:solidFill>
+            <a:schemeClr val="bg1"/>
+          </a:solidFill>
+        </p:grpSpPr>
+        <p:sp>
+          <p:nvSpPr>
+            <p:cNvPr id="3" name="矩形 2">
+              <a:extLst>
+                <a:ext uri="{FF2B5EF4-FFF2-40B4-BE49-F238E27FC236}">
+                  <a16:creationId xmlns:a16="http://schemas.microsoft.com/office/drawing/2014/main" id="{6E1636D5-E427-3E3D-E6CE-2DEE2034AD85}"/>
+                </a:ext>
+              </a:extLst>
+            </p:cNvPr>
+            <p:cNvSpPr/>
+            <p:nvPr/>
+          </p:nvSpPr>
+          <p:spPr>
+            <a:xfrm>
+              <a:off x="9721312" y="1295952"/>
+              <a:ext cx="1440100" cy="432030"/>
+            </a:xfrm>
+            <a:prstGeom prst="rect">
+              <a:avLst/>
+            </a:prstGeom>
+            <a:grpFill/>
+            <a:ln>
+              <a:noFill/>
+            </a:ln>
+          </p:spPr>
+          <p:style>
+            <a:lnRef idx="2">
+              <a:schemeClr val="accent1">
+                <a:shade val="15000"/>
+              </a:schemeClr>
+            </a:lnRef>
+            <a:fillRef idx="1">
+              <a:schemeClr val="accent1"/>
+            </a:fillRef>
+            <a:effectRef idx="0">
+              <a:schemeClr val="accent1"/>
+            </a:effectRef>
+            <a:fontRef idx="minor">
+              <a:schemeClr val="lt1"/>
+            </a:fontRef>
+          </p:style>
+          <p:txBody>
+            <a:bodyPr rtlCol="0" anchor="ctr"/>
+            <a:lstStyle/>
+            <a:p>
+              <a:pPr algn="ctr"/>
+              <a:endParaRPr lang="zh-CN" altLang="en-US"/>
+            </a:p>
+          </p:txBody>
+        </p:sp>
+        <p:pic>
+          <p:nvPicPr>
+            <p:cNvPr id="14" name="图片 13">
+              <a:extLst>
+                <a:ext uri="{FF2B5EF4-FFF2-40B4-BE49-F238E27FC236}">
+                  <a16:creationId xmlns:a16="http://schemas.microsoft.com/office/drawing/2014/main" id="{481D5702-3C3E-9239-EC61-B93E00BEA581}"/>
+                </a:ext>
+              </a:extLst>
+            </p:cNvPr>
+            <p:cNvPicPr>
+              <a:picLocks noChangeAspect="1"/>
+            </p:cNvPicPr>
+            <p:nvPr/>
+          </p:nvPicPr>
+          <p:blipFill>
+            <a:blip r:embed="rId5">
+              <a:extLst>
+                <a:ext uri="{28A0092B-C50C-407E-A947-70E740481C1C}">
+                  <a14:useLocalDpi xmlns:a14="http://schemas.microsoft.com/office/drawing/2010/main" val="0"/>
+                </a:ext>
+              </a:extLst>
+            </a:blip>
+            <a:stretch>
+              <a:fillRect/>
+            </a:stretch>
+          </p:blipFill>
+          <p:spPr>
+            <a:xfrm>
+              <a:off x="9577302" y="1165376"/>
+              <a:ext cx="1695878" cy="706616"/>
+            </a:xfrm>
+            <a:prstGeom prst="rect">
+              <a:avLst/>
+            </a:prstGeom>
+            <a:grpFill/>
+          </p:spPr>
+        </p:pic>
+      </p:grpSp>
     </p:spTree>
   </p:cSld>
   <p:clrMapOvr>
@@ -20350,6 +21560,117 @@
           </a:p>
         </p:txBody>
       </p:sp>
+      <p:grpSp>
+        <p:nvGrpSpPr>
+          <p:cNvPr id="2" name="组合 1">
+            <a:extLst>
+              <a:ext uri="{FF2B5EF4-FFF2-40B4-BE49-F238E27FC236}">
+                <a16:creationId xmlns:a16="http://schemas.microsoft.com/office/drawing/2014/main" id="{4CF748F5-6686-0588-3DA4-C67ABCA30E27}"/>
+              </a:ext>
+            </a:extLst>
+          </p:cNvPr>
+          <p:cNvGrpSpPr/>
+          <p:nvPr/>
+        </p:nvGrpSpPr>
+        <p:grpSpPr>
+          <a:xfrm>
+            <a:off x="9577302" y="215877"/>
+            <a:ext cx="1695878" cy="706616"/>
+            <a:chOff x="9577302" y="1165376"/>
+            <a:chExt cx="1695878" cy="706616"/>
+          </a:xfrm>
+          <a:solidFill>
+            <a:schemeClr val="bg1"/>
+          </a:solidFill>
+        </p:grpSpPr>
+        <p:sp>
+          <p:nvSpPr>
+            <p:cNvPr id="3" name="矩形 2">
+              <a:extLst>
+                <a:ext uri="{FF2B5EF4-FFF2-40B4-BE49-F238E27FC236}">
+                  <a16:creationId xmlns:a16="http://schemas.microsoft.com/office/drawing/2014/main" id="{09C2EE51-5D9A-0C7F-675E-3CB517AD24AB}"/>
+                </a:ext>
+              </a:extLst>
+            </p:cNvPr>
+            <p:cNvSpPr/>
+            <p:nvPr/>
+          </p:nvSpPr>
+          <p:spPr>
+            <a:xfrm>
+              <a:off x="9721312" y="1295952"/>
+              <a:ext cx="1440100" cy="432030"/>
+            </a:xfrm>
+            <a:prstGeom prst="rect">
+              <a:avLst/>
+            </a:prstGeom>
+            <a:grpFill/>
+            <a:ln>
+              <a:noFill/>
+            </a:ln>
+          </p:spPr>
+          <p:style>
+            <a:lnRef idx="2">
+              <a:schemeClr val="accent1">
+                <a:shade val="15000"/>
+              </a:schemeClr>
+            </a:lnRef>
+            <a:fillRef idx="1">
+              <a:schemeClr val="accent1"/>
+            </a:fillRef>
+            <a:effectRef idx="0">
+              <a:schemeClr val="accent1"/>
+            </a:effectRef>
+            <a:fontRef idx="minor">
+              <a:schemeClr val="lt1"/>
+            </a:fontRef>
+          </p:style>
+          <p:txBody>
+            <a:bodyPr rtlCol="0" anchor="ctr"/>
+            <a:lstStyle/>
+            <a:p>
+              <a:pPr algn="ctr"/>
+              <a:endParaRPr lang="zh-CN" altLang="en-US"/>
+            </a:p>
+          </p:txBody>
+        </p:sp>
+        <p:pic>
+          <p:nvPicPr>
+            <p:cNvPr id="20" name="图片 19">
+              <a:extLst>
+                <a:ext uri="{FF2B5EF4-FFF2-40B4-BE49-F238E27FC236}">
+                  <a16:creationId xmlns:a16="http://schemas.microsoft.com/office/drawing/2014/main" id="{D3B181CE-884E-ADBE-8D80-691A1AEF91A7}"/>
+                </a:ext>
+              </a:extLst>
+            </p:cNvPr>
+            <p:cNvPicPr>
+              <a:picLocks noChangeAspect="1"/>
+            </p:cNvPicPr>
+            <p:nvPr/>
+          </p:nvPicPr>
+          <p:blipFill>
+            <a:blip r:embed="rId5">
+              <a:extLst>
+                <a:ext uri="{28A0092B-C50C-407E-A947-70E740481C1C}">
+                  <a14:useLocalDpi xmlns:a14="http://schemas.microsoft.com/office/drawing/2010/main" val="0"/>
+                </a:ext>
+              </a:extLst>
+            </a:blip>
+            <a:stretch>
+              <a:fillRect/>
+            </a:stretch>
+          </p:blipFill>
+          <p:spPr>
+            <a:xfrm>
+              <a:off x="9577302" y="1165376"/>
+              <a:ext cx="1695878" cy="706616"/>
+            </a:xfrm>
+            <a:prstGeom prst="rect">
+              <a:avLst/>
+            </a:prstGeom>
+            <a:grpFill/>
+          </p:spPr>
+        </p:pic>
+      </p:grpSp>
     </p:spTree>
   </p:cSld>
   <p:clrMapOvr>
